--- a/recursos/presentacion_v5.pptx
+++ b/recursos/presentacion_v5.pptx
@@ -2270,6 +2270,13 @@
           </a:solidFill>
           <a:ln/>
         </p:spPr>
+        <p:txBody>
+          <a:bodyPr/>
+          <a:lstStyle/>
+          <a:p>
+            <a:endParaRPr lang="es-CO"/>
+          </a:p>
+        </p:txBody>
       </p:sp>
       <p:sp>
         <p:nvSpPr>
@@ -2473,6 +2480,13 @@
           </a:solidFill>
           <a:ln/>
         </p:spPr>
+        <p:txBody>
+          <a:bodyPr/>
+          <a:lstStyle/>
+          <a:p>
+            <a:endParaRPr lang="es-CO"/>
+          </a:p>
+        </p:txBody>
       </p:sp>
       <p:sp>
         <p:nvSpPr>
@@ -2493,6 +2507,13 @@
           </a:solidFill>
           <a:ln/>
         </p:spPr>
+        <p:txBody>
+          <a:bodyPr/>
+          <a:lstStyle/>
+          <a:p>
+            <a:endParaRPr lang="es-CO"/>
+          </a:p>
+        </p:txBody>
       </p:sp>
       <p:sp>
         <p:nvSpPr>
@@ -2513,6 +2534,13 @@
           </a:solidFill>
           <a:ln/>
         </p:spPr>
+        <p:txBody>
+          <a:bodyPr/>
+          <a:lstStyle/>
+          <a:p>
+            <a:endParaRPr lang="es-CO"/>
+          </a:p>
+        </p:txBody>
       </p:sp>
       <p:sp>
         <p:nvSpPr>
@@ -2715,6 +2743,13 @@
             <a:prstDash val="solid"/>
           </a:ln>
         </p:spPr>
+        <p:txBody>
+          <a:bodyPr/>
+          <a:lstStyle/>
+          <a:p>
+            <a:endParaRPr lang="es-CO"/>
+          </a:p>
+        </p:txBody>
       </p:sp>
       <p:sp>
         <p:nvSpPr>
@@ -3044,6 +3079,13 @@
             </a:outerShdw>
           </a:effectLst>
         </p:spPr>
+        <p:txBody>
+          <a:bodyPr/>
+          <a:lstStyle/>
+          <a:p>
+            <a:endParaRPr lang="es-CO"/>
+          </a:p>
+        </p:txBody>
       </p:sp>
       <p:sp>
         <p:nvSpPr>
@@ -3184,6 +3226,13 @@
             </a:outerShdw>
           </a:effectLst>
         </p:spPr>
+        <p:txBody>
+          <a:bodyPr/>
+          <a:lstStyle/>
+          <a:p>
+            <a:endParaRPr lang="es-CO"/>
+          </a:p>
+        </p:txBody>
       </p:sp>
       <p:sp>
         <p:nvSpPr>
@@ -3324,6 +3373,13 @@
             </a:outerShdw>
           </a:effectLst>
         </p:spPr>
+        <p:txBody>
+          <a:bodyPr/>
+          <a:lstStyle/>
+          <a:p>
+            <a:endParaRPr lang="es-CO"/>
+          </a:p>
+        </p:txBody>
       </p:sp>
       <p:sp>
         <p:nvSpPr>
@@ -3464,6 +3520,13 @@
             </a:outerShdw>
           </a:effectLst>
         </p:spPr>
+        <p:txBody>
+          <a:bodyPr/>
+          <a:lstStyle/>
+          <a:p>
+            <a:endParaRPr lang="es-CO"/>
+          </a:p>
+        </p:txBody>
       </p:sp>
       <p:sp>
         <p:nvSpPr>
@@ -3597,6 +3660,13 @@
           </a:solidFill>
           <a:ln/>
         </p:spPr>
+        <p:txBody>
+          <a:bodyPr/>
+          <a:lstStyle/>
+          <a:p>
+            <a:endParaRPr lang="es-CO"/>
+          </a:p>
+        </p:txBody>
       </p:sp>
       <p:sp>
         <p:nvSpPr>
@@ -3706,7 +3776,7 @@
         </p:nvSpPr>
         <p:spPr>
           <a:xfrm>
-            <a:off x="8275320" y="4832604"/>
+            <a:off x="8275320" y="4841272"/>
             <a:ext cx="365760" cy="228600"/>
           </a:xfrm>
           <a:prstGeom prst="rect">
@@ -3731,7 +3801,7 @@
                 <a:ea typeface="Calibri" pitchFamily="34" charset="-122"/>
                 <a:cs typeface="Calibri" pitchFamily="34" charset="-120"/>
               </a:rPr>
-              <a:t>11</a:t>
+              <a:t>10</a:t>
             </a:r>
             <a:endParaRPr lang="en-US" sz="850" dirty="0"/>
           </a:p>
@@ -3948,6 +4018,13 @@
             </a:outerShdw>
           </a:effectLst>
         </p:spPr>
+        <p:txBody>
+          <a:bodyPr/>
+          <a:lstStyle/>
+          <a:p>
+            <a:endParaRPr lang="es-CO"/>
+          </a:p>
+        </p:txBody>
       </p:sp>
       <p:sp>
         <p:nvSpPr>
@@ -3968,6 +4045,13 @@
           </a:solidFill>
           <a:ln/>
         </p:spPr>
+        <p:txBody>
+          <a:bodyPr/>
+          <a:lstStyle/>
+          <a:p>
+            <a:endParaRPr lang="es-CO"/>
+          </a:p>
+        </p:txBody>
       </p:sp>
       <p:sp>
         <p:nvSpPr>
@@ -4114,6 +4198,13 @@
             </a:outerShdw>
           </a:effectLst>
         </p:spPr>
+        <p:txBody>
+          <a:bodyPr/>
+          <a:lstStyle/>
+          <a:p>
+            <a:endParaRPr lang="es-CO"/>
+          </a:p>
+        </p:txBody>
       </p:sp>
       <p:sp>
         <p:nvSpPr>
@@ -4134,6 +4225,13 @@
           </a:solidFill>
           <a:ln/>
         </p:spPr>
+        <p:txBody>
+          <a:bodyPr/>
+          <a:lstStyle/>
+          <a:p>
+            <a:endParaRPr lang="es-CO"/>
+          </a:p>
+        </p:txBody>
       </p:sp>
       <p:sp>
         <p:nvSpPr>
@@ -4280,6 +4378,13 @@
             </a:outerShdw>
           </a:effectLst>
         </p:spPr>
+        <p:txBody>
+          <a:bodyPr/>
+          <a:lstStyle/>
+          <a:p>
+            <a:endParaRPr lang="es-CO"/>
+          </a:p>
+        </p:txBody>
       </p:sp>
       <p:sp>
         <p:nvSpPr>
@@ -4300,6 +4405,13 @@
           </a:solidFill>
           <a:ln/>
         </p:spPr>
+        <p:txBody>
+          <a:bodyPr/>
+          <a:lstStyle/>
+          <a:p>
+            <a:endParaRPr lang="es-CO"/>
+          </a:p>
+        </p:txBody>
       </p:sp>
       <p:sp>
         <p:nvSpPr>
@@ -4446,6 +4558,13 @@
             </a:outerShdw>
           </a:effectLst>
         </p:spPr>
+        <p:txBody>
+          <a:bodyPr/>
+          <a:lstStyle/>
+          <a:p>
+            <a:endParaRPr lang="es-CO"/>
+          </a:p>
+        </p:txBody>
       </p:sp>
       <p:sp>
         <p:nvSpPr>
@@ -4466,6 +4585,13 @@
           </a:solidFill>
           <a:ln/>
         </p:spPr>
+        <p:txBody>
+          <a:bodyPr/>
+          <a:lstStyle/>
+          <a:p>
+            <a:endParaRPr lang="es-CO"/>
+          </a:p>
+        </p:txBody>
       </p:sp>
       <p:sp>
         <p:nvSpPr>
@@ -4612,6 +4738,13 @@
             </a:outerShdw>
           </a:effectLst>
         </p:spPr>
+        <p:txBody>
+          <a:bodyPr/>
+          <a:lstStyle/>
+          <a:p>
+            <a:endParaRPr lang="es-CO"/>
+          </a:p>
+        </p:txBody>
       </p:sp>
       <p:sp>
         <p:nvSpPr>
@@ -4632,6 +4765,13 @@
           </a:solidFill>
           <a:ln/>
         </p:spPr>
+        <p:txBody>
+          <a:bodyPr/>
+          <a:lstStyle/>
+          <a:p>
+            <a:endParaRPr lang="es-CO"/>
+          </a:p>
+        </p:txBody>
       </p:sp>
       <p:sp>
         <p:nvSpPr>
@@ -4778,6 +4918,13 @@
             </a:outerShdw>
           </a:effectLst>
         </p:spPr>
+        <p:txBody>
+          <a:bodyPr/>
+          <a:lstStyle/>
+          <a:p>
+            <a:endParaRPr lang="es-CO"/>
+          </a:p>
+        </p:txBody>
       </p:sp>
       <p:sp>
         <p:nvSpPr>
@@ -4798,6 +4945,13 @@
           </a:solidFill>
           <a:ln/>
         </p:spPr>
+        <p:txBody>
+          <a:bodyPr/>
+          <a:lstStyle/>
+          <a:p>
+            <a:endParaRPr lang="es-CO"/>
+          </a:p>
+        </p:txBody>
       </p:sp>
       <p:sp>
         <p:nvSpPr>
@@ -5038,7 +5192,7 @@
                 <a:ea typeface="Calibri" pitchFamily="34" charset="-122"/>
                 <a:cs typeface="Calibri" pitchFamily="34" charset="-120"/>
               </a:rPr>
-              <a:t>09</a:t>
+              <a:t>11</a:t>
             </a:r>
             <a:endParaRPr lang="en-US" sz="850" dirty="0"/>
           </a:p>
@@ -5273,6 +5427,13 @@
             </a:outerShdw>
           </a:effectLst>
         </p:spPr>
+        <p:txBody>
+          <a:bodyPr/>
+          <a:lstStyle/>
+          <a:p>
+            <a:endParaRPr lang="es-CO"/>
+          </a:p>
+        </p:txBody>
       </p:sp>
       <p:sp>
         <p:nvSpPr>
@@ -5759,6 +5920,13 @@
             </a:outerShdw>
           </a:effectLst>
         </p:spPr>
+        <p:txBody>
+          <a:bodyPr/>
+          <a:lstStyle/>
+          <a:p>
+            <a:endParaRPr lang="es-CO"/>
+          </a:p>
+        </p:txBody>
       </p:sp>
       <p:sp>
         <p:nvSpPr>
@@ -6167,6 +6335,13 @@
           </a:solidFill>
           <a:ln/>
         </p:spPr>
+        <p:txBody>
+          <a:bodyPr/>
+          <a:lstStyle/>
+          <a:p>
+            <a:endParaRPr lang="es-CO"/>
+          </a:p>
+        </p:txBody>
       </p:sp>
       <p:sp>
         <p:nvSpPr>
@@ -6218,7 +6393,29 @@
                 <a:ea typeface="Calibri" pitchFamily="34" charset="-122"/>
                 <a:cs typeface="Calibri" pitchFamily="34" charset="-120"/>
               </a:rPr>
-              <a:t>cualquiera de los 25.357 datasets del catálogo es consultable — índice semántico completo + acceso por lenguaje natural. 10.280 responden además desde copia local en milisegundos.</a:t>
+              <a:t>cualquiera de </a:t>
+            </a:r>
+            <a:r>
+              <a:rPr lang="en-US" sz="1050" dirty="0" err="1">
+                <a:solidFill>
+                  <a:srgbClr val="D5E4EE"/>
+                </a:solidFill>
+                <a:latin typeface="Calibri" pitchFamily="34" charset="0"/>
+                <a:ea typeface="Calibri" pitchFamily="34" charset="-122"/>
+                <a:cs typeface="Calibri" pitchFamily="34" charset="-120"/>
+              </a:rPr>
+              <a:t>los</a:t>
+            </a:r>
+            <a:r>
+              <a:rPr lang="en-US" sz="1050" dirty="0">
+                <a:solidFill>
+                  <a:srgbClr val="D5E4EE"/>
+                </a:solidFill>
+                <a:latin typeface="Calibri" pitchFamily="34" charset="0"/>
+                <a:ea typeface="Calibri" pitchFamily="34" charset="-122"/>
+                <a:cs typeface="Calibri" pitchFamily="34" charset="-120"/>
+              </a:rPr>
+              <a:t> 25.410 datasets del catálogo es consultable — índice semántico completo + acceso por lenguaje natural. 10.280 responden además desde copia local en milisegundos.</a:t>
             </a:r>
             <a:endParaRPr lang="en-US" sz="1050" dirty="0"/>
           </a:p>
@@ -6319,7 +6516,7 @@
                 <a:ea typeface="Calibri" pitchFamily="34" charset="-122"/>
                 <a:cs typeface="Calibri" pitchFamily="34" charset="-120"/>
               </a:rPr>
-              <a:t>06</a:t>
+              <a:t>12</a:t>
             </a:r>
             <a:endParaRPr lang="en-US" sz="850" dirty="0"/>
           </a:p>
@@ -8896,6 +9093,13 @@
           </a:solidFill>
           <a:ln/>
         </p:spPr>
+        <p:txBody>
+          <a:bodyPr/>
+          <a:lstStyle/>
+          <a:p>
+            <a:endParaRPr lang="es-CO"/>
+          </a:p>
+        </p:txBody>
       </p:sp>
       <p:sp>
         <p:nvSpPr>
@@ -9030,7 +9234,7 @@
                 <a:ea typeface="Calibri" pitchFamily="34" charset="-122"/>
                 <a:cs typeface="Calibri" pitchFamily="34" charset="-120"/>
               </a:rPr>
-              <a:t>21</a:t>
+              <a:t>13</a:t>
             </a:r>
             <a:endParaRPr lang="en-US" sz="850" dirty="0"/>
           </a:p>
@@ -9175,6 +9379,13 @@
             </a:outerShdw>
           </a:effectLst>
         </p:spPr>
+        <p:txBody>
+          <a:bodyPr/>
+          <a:lstStyle/>
+          <a:p>
+            <a:endParaRPr lang="es-CO"/>
+          </a:p>
+        </p:txBody>
       </p:sp>
       <p:sp>
         <p:nvSpPr>
@@ -9543,6 +9754,13 @@
             </a:outerShdw>
           </a:effectLst>
         </p:spPr>
+        <p:txBody>
+          <a:bodyPr/>
+          <a:lstStyle/>
+          <a:p>
+            <a:endParaRPr lang="es-CO"/>
+          </a:p>
+        </p:txBody>
       </p:sp>
       <p:sp>
         <p:nvSpPr>
@@ -9650,6 +9868,13 @@
             </a:outerShdw>
           </a:effectLst>
         </p:spPr>
+        <p:txBody>
+          <a:bodyPr/>
+          <a:lstStyle/>
+          <a:p>
+            <a:endParaRPr lang="es-CO"/>
+          </a:p>
+        </p:txBody>
       </p:sp>
       <p:sp>
         <p:nvSpPr>
@@ -9750,6 +9975,13 @@
           </a:solidFill>
           <a:ln/>
         </p:spPr>
+        <p:txBody>
+          <a:bodyPr/>
+          <a:lstStyle/>
+          <a:p>
+            <a:endParaRPr lang="es-CO"/>
+          </a:p>
+        </p:txBody>
       </p:sp>
       <p:sp>
         <p:nvSpPr>
@@ -9915,17 +10147,9 @@
               <a:buNone/>
             </a:pPr>
             <a:r>
-              <a:rPr lang="en-US" sz="850" dirty="0">
-                <a:solidFill>
-                  <a:srgbClr val="7F8C8D"/>
-                </a:solidFill>
-                <a:latin typeface="Calibri" pitchFamily="34" charset="0"/>
-                <a:ea typeface="Calibri" pitchFamily="34" charset="-122"/>
-                <a:cs typeface="Calibri" pitchFamily="34" charset="-120"/>
-              </a:rPr>
-              <a:t>22</a:t>
-            </a:r>
-            <a:endParaRPr lang="en-US" sz="850" dirty="0"/>
+              <a:rPr lang="en-US" sz="850" dirty="0"/>
+              <a:t>14</a:t>
+            </a:r>
           </a:p>
         </p:txBody>
       </p:sp>
@@ -10068,6 +10292,13 @@
             </a:outerShdw>
           </a:effectLst>
         </p:spPr>
+        <p:txBody>
+          <a:bodyPr/>
+          <a:lstStyle/>
+          <a:p>
+            <a:endParaRPr lang="es-CO"/>
+          </a:p>
+        </p:txBody>
       </p:sp>
       <p:sp>
         <p:nvSpPr>
@@ -10088,6 +10319,13 @@
           </a:solidFill>
           <a:ln/>
         </p:spPr>
+        <p:txBody>
+          <a:bodyPr/>
+          <a:lstStyle/>
+          <a:p>
+            <a:endParaRPr lang="es-CO"/>
+          </a:p>
+        </p:txBody>
       </p:sp>
       <p:sp>
         <p:nvSpPr>
@@ -10195,6 +10433,13 @@
             </a:outerShdw>
           </a:effectLst>
         </p:spPr>
+        <p:txBody>
+          <a:bodyPr/>
+          <a:lstStyle/>
+          <a:p>
+            <a:endParaRPr lang="es-CO"/>
+          </a:p>
+        </p:txBody>
       </p:sp>
       <p:sp>
         <p:nvSpPr>
@@ -10215,6 +10460,13 @@
           </a:solidFill>
           <a:ln/>
         </p:spPr>
+        <p:txBody>
+          <a:bodyPr/>
+          <a:lstStyle/>
+          <a:p>
+            <a:endParaRPr lang="es-CO"/>
+          </a:p>
+        </p:txBody>
       </p:sp>
       <p:sp>
         <p:nvSpPr>
@@ -10322,6 +10574,13 @@
             </a:outerShdw>
           </a:effectLst>
         </p:spPr>
+        <p:txBody>
+          <a:bodyPr/>
+          <a:lstStyle/>
+          <a:p>
+            <a:endParaRPr lang="es-CO"/>
+          </a:p>
+        </p:txBody>
       </p:sp>
       <p:sp>
         <p:nvSpPr>
@@ -10342,6 +10601,13 @@
           </a:solidFill>
           <a:ln/>
         </p:spPr>
+        <p:txBody>
+          <a:bodyPr/>
+          <a:lstStyle/>
+          <a:p>
+            <a:endParaRPr lang="es-CO"/>
+          </a:p>
+        </p:txBody>
       </p:sp>
       <p:sp>
         <p:nvSpPr>
@@ -10449,6 +10715,13 @@
             </a:outerShdw>
           </a:effectLst>
         </p:spPr>
+        <p:txBody>
+          <a:bodyPr/>
+          <a:lstStyle/>
+          <a:p>
+            <a:endParaRPr lang="es-CO"/>
+          </a:p>
+        </p:txBody>
       </p:sp>
       <p:sp>
         <p:nvSpPr>
@@ -10469,6 +10742,13 @@
           </a:solidFill>
           <a:ln/>
         </p:spPr>
+        <p:txBody>
+          <a:bodyPr/>
+          <a:lstStyle/>
+          <a:p>
+            <a:endParaRPr lang="es-CO"/>
+          </a:p>
+        </p:txBody>
       </p:sp>
       <p:sp>
         <p:nvSpPr>
@@ -10662,17 +10942,9 @@
               <a:buNone/>
             </a:pPr>
             <a:r>
-              <a:rPr lang="en-US" sz="850" dirty="0">
-                <a:solidFill>
-                  <a:srgbClr val="7F8C8D"/>
-                </a:solidFill>
-                <a:latin typeface="Calibri" pitchFamily="34" charset="0"/>
-                <a:ea typeface="Calibri" pitchFamily="34" charset="-122"/>
-                <a:cs typeface="Calibri" pitchFamily="34" charset="-120"/>
-              </a:rPr>
-              <a:t>10</a:t>
-            </a:r>
-            <a:endParaRPr lang="en-US" sz="850" dirty="0"/>
+              <a:rPr lang="en-US" sz="850" dirty="0"/>
+              <a:t>15</a:t>
+            </a:r>
           </a:p>
         </p:txBody>
       </p:sp>
@@ -10895,6 +11167,13 @@
           </a:solidFill>
           <a:ln/>
         </p:spPr>
+        <p:txBody>
+          <a:bodyPr/>
+          <a:lstStyle/>
+          <a:p>
+            <a:endParaRPr lang="es-CO"/>
+          </a:p>
+        </p:txBody>
       </p:sp>
       <p:pic>
         <p:nvPicPr>
@@ -11285,6 +11564,13 @@
           </a:solidFill>
           <a:ln/>
         </p:spPr>
+        <p:txBody>
+          <a:bodyPr/>
+          <a:lstStyle/>
+          <a:p>
+            <a:endParaRPr lang="es-CO"/>
+          </a:p>
+        </p:txBody>
       </p:sp>
       <p:pic>
         <p:nvPicPr>
@@ -11432,7 +11718,7 @@
                 <a:ea typeface="Calibri" pitchFamily="34" charset="-122"/>
                 <a:cs typeface="Calibri" pitchFamily="34" charset="-120"/>
               </a:rPr>
-              <a:t>13</a:t>
+              <a:t>16</a:t>
             </a:r>
             <a:endParaRPr lang="en-US" sz="850" dirty="0"/>
           </a:p>
@@ -11729,7 +12015,7 @@
                 <a:ea typeface="Calibri" pitchFamily="34" charset="-122"/>
                 <a:cs typeface="Calibri" pitchFamily="34" charset="-120"/>
               </a:rPr>
-              <a:t>14</a:t>
+              <a:t>17</a:t>
             </a:r>
             <a:endParaRPr lang="en-US" sz="850" dirty="0"/>
           </a:p>
@@ -11946,17 +12232,9 @@
               <a:buNone/>
             </a:pPr>
             <a:r>
-              <a:rPr lang="en-US" sz="850" dirty="0">
-                <a:solidFill>
-                  <a:srgbClr val="7F8C8D"/>
-                </a:solidFill>
-                <a:latin typeface="Calibri" pitchFamily="34" charset="0"/>
-                <a:ea typeface="Calibri" pitchFamily="34" charset="-122"/>
-                <a:cs typeface="Calibri" pitchFamily="34" charset="-120"/>
-              </a:rPr>
-              <a:t>15</a:t>
-            </a:r>
-            <a:endParaRPr lang="en-US" sz="850" dirty="0"/>
+              <a:rPr lang="en-US" sz="850" dirty="0"/>
+              <a:t>18</a:t>
+            </a:r>
           </a:p>
         </p:txBody>
       </p:sp>
@@ -12138,6 +12416,13 @@
             </a:outerShdw>
           </a:effectLst>
         </p:spPr>
+        <p:txBody>
+          <a:bodyPr/>
+          <a:lstStyle/>
+          <a:p>
+            <a:endParaRPr lang="es-CO"/>
+          </a:p>
+        </p:txBody>
       </p:sp>
       <p:pic>
         <p:nvPicPr>
@@ -12269,6 +12554,13 @@
             </a:outerShdw>
           </a:effectLst>
         </p:spPr>
+        <p:txBody>
+          <a:bodyPr/>
+          <a:lstStyle/>
+          <a:p>
+            <a:endParaRPr lang="es-CO"/>
+          </a:p>
+        </p:txBody>
       </p:sp>
       <p:pic>
         <p:nvPicPr>
@@ -12400,6 +12692,13 @@
             </a:outerShdw>
           </a:effectLst>
         </p:spPr>
+        <p:txBody>
+          <a:bodyPr/>
+          <a:lstStyle/>
+          <a:p>
+            <a:endParaRPr lang="es-CO"/>
+          </a:p>
+        </p:txBody>
       </p:sp>
       <p:pic>
         <p:nvPicPr>
@@ -12531,6 +12830,13 @@
             </a:outerShdw>
           </a:effectLst>
         </p:spPr>
+        <p:txBody>
+          <a:bodyPr/>
+          <a:lstStyle/>
+          <a:p>
+            <a:endParaRPr lang="es-CO"/>
+          </a:p>
+        </p:txBody>
       </p:sp>
       <p:pic>
         <p:nvPicPr>
@@ -12717,7 +13023,7 @@
                 <a:ea typeface="Calibri" pitchFamily="34" charset="-122"/>
                 <a:cs typeface="Calibri" pitchFamily="34" charset="-120"/>
               </a:rPr>
-              <a:t>16</a:t>
+              <a:t>19</a:t>
             </a:r>
             <a:endParaRPr lang="en-US" sz="850" dirty="0"/>
           </a:p>
@@ -12784,6 +13090,13 @@
             </a:outerShdw>
           </a:effectLst>
         </p:spPr>
+        <p:txBody>
+          <a:bodyPr/>
+          <a:lstStyle/>
+          <a:p>
+            <a:endParaRPr lang="es-CO"/>
+          </a:p>
+        </p:txBody>
       </p:sp>
       <p:sp>
         <p:nvSpPr>
@@ -12819,6 +13132,13 @@
             </a:outerShdw>
           </a:effectLst>
         </p:spPr>
+        <p:txBody>
+          <a:bodyPr/>
+          <a:lstStyle/>
+          <a:p>
+            <a:endParaRPr lang="es-CO"/>
+          </a:p>
+        </p:txBody>
       </p:sp>
       <p:sp>
         <p:nvSpPr>
@@ -12950,6 +13270,13 @@
             </a:outerShdw>
           </a:effectLst>
         </p:spPr>
+        <p:txBody>
+          <a:bodyPr/>
+          <a:lstStyle/>
+          <a:p>
+            <a:endParaRPr lang="es-CO"/>
+          </a:p>
+        </p:txBody>
       </p:sp>
       <p:pic>
         <p:nvPicPr>
@@ -13081,6 +13408,13 @@
             </a:outerShdw>
           </a:effectLst>
         </p:spPr>
+        <p:txBody>
+          <a:bodyPr/>
+          <a:lstStyle/>
+          <a:p>
+            <a:endParaRPr lang="es-CO"/>
+          </a:p>
+        </p:txBody>
       </p:sp>
       <p:pic>
         <p:nvPicPr>
@@ -13289,6 +13623,13 @@
             </a:outerShdw>
           </a:effectLst>
         </p:spPr>
+        <p:txBody>
+          <a:bodyPr/>
+          <a:lstStyle/>
+          <a:p>
+            <a:endParaRPr lang="es-CO"/>
+          </a:p>
+        </p:txBody>
       </p:sp>
       <p:pic>
         <p:nvPicPr>
@@ -13975,6 +14316,13 @@
             </a:outerShdw>
           </a:effectLst>
         </p:spPr>
+        <p:txBody>
+          <a:bodyPr/>
+          <a:lstStyle/>
+          <a:p>
+            <a:endParaRPr lang="es-CO"/>
+          </a:p>
+        </p:txBody>
       </p:sp>
       <p:pic>
         <p:nvPicPr>
@@ -14106,6 +14454,13 @@
             </a:outerShdw>
           </a:effectLst>
         </p:spPr>
+        <p:txBody>
+          <a:bodyPr/>
+          <a:lstStyle/>
+          <a:p>
+            <a:endParaRPr lang="es-CO"/>
+          </a:p>
+        </p:txBody>
       </p:sp>
       <p:pic>
         <p:nvPicPr>
@@ -14237,6 +14592,13 @@
             </a:outerShdw>
           </a:effectLst>
         </p:spPr>
+        <p:txBody>
+          <a:bodyPr/>
+          <a:lstStyle/>
+          <a:p>
+            <a:endParaRPr lang="es-CO"/>
+          </a:p>
+        </p:txBody>
       </p:sp>
       <p:pic>
         <p:nvPicPr>
@@ -14368,6 +14730,13 @@
             </a:outerShdw>
           </a:effectLst>
         </p:spPr>
+        <p:txBody>
+          <a:bodyPr/>
+          <a:lstStyle/>
+          <a:p>
+            <a:endParaRPr lang="es-CO"/>
+          </a:p>
+        </p:txBody>
       </p:sp>
       <p:pic>
         <p:nvPicPr>
@@ -14499,6 +14868,13 @@
             </a:outerShdw>
           </a:effectLst>
         </p:spPr>
+        <p:txBody>
+          <a:bodyPr/>
+          <a:lstStyle/>
+          <a:p>
+            <a:endParaRPr lang="es-CO"/>
+          </a:p>
+        </p:txBody>
       </p:sp>
       <p:pic>
         <p:nvPicPr>
@@ -14630,6 +15006,13 @@
             </a:outerShdw>
           </a:effectLst>
         </p:spPr>
+        <p:txBody>
+          <a:bodyPr/>
+          <a:lstStyle/>
+          <a:p>
+            <a:endParaRPr lang="es-CO"/>
+          </a:p>
+        </p:txBody>
       </p:sp>
       <p:pic>
         <p:nvPicPr>
@@ -14816,7 +15199,7 @@
                 <a:ea typeface="Calibri" pitchFamily="34" charset="-122"/>
                 <a:cs typeface="Calibri" pitchFamily="34" charset="-120"/>
               </a:rPr>
-              <a:t>17</a:t>
+              <a:t>20</a:t>
             </a:r>
             <a:endParaRPr lang="en-US" sz="850" dirty="0"/>
           </a:p>
@@ -14883,6 +15266,13 @@
             </a:outerShdw>
           </a:effectLst>
         </p:spPr>
+        <p:txBody>
+          <a:bodyPr/>
+          <a:lstStyle/>
+          <a:p>
+            <a:endParaRPr lang="es-CO"/>
+          </a:p>
+        </p:txBody>
       </p:sp>
       <p:sp>
         <p:nvSpPr>
@@ -15029,6 +15419,13 @@
             </a:outerShdw>
           </a:effectLst>
         </p:spPr>
+        <p:txBody>
+          <a:bodyPr/>
+          <a:lstStyle/>
+          <a:p>
+            <a:endParaRPr lang="es-CO"/>
+          </a:p>
+        </p:txBody>
       </p:sp>
       <p:pic>
         <p:nvPicPr>
@@ -15238,6 +15635,13 @@
             </a:outerShdw>
           </a:effectLst>
         </p:spPr>
+        <p:txBody>
+          <a:bodyPr/>
+          <a:lstStyle/>
+          <a:p>
+            <a:endParaRPr lang="es-CO"/>
+          </a:p>
+        </p:txBody>
       </p:sp>
       <p:pic>
         <p:nvPicPr>
@@ -15369,6 +15773,13 @@
             </a:outerShdw>
           </a:effectLst>
         </p:spPr>
+        <p:txBody>
+          <a:bodyPr/>
+          <a:lstStyle/>
+          <a:p>
+            <a:endParaRPr lang="es-CO"/>
+          </a:p>
+        </p:txBody>
       </p:sp>
       <p:pic>
         <p:nvPicPr>
@@ -15555,9 +15966,8 @@
                 <a:ea typeface="Calibri" pitchFamily="34" charset="-122"/>
                 <a:cs typeface="Calibri" pitchFamily="34" charset="-120"/>
               </a:rPr>
-              <a:t>18</a:t>
-            </a:r>
-            <a:endParaRPr lang="en-US" sz="850" dirty="0"/>
+              <a:t>21</a:t>
+            </a:r>
           </a:p>
         </p:txBody>
       </p:sp>
@@ -15799,6 +16209,13 @@
             </a:outerShdw>
           </a:effectLst>
         </p:spPr>
+        <p:txBody>
+          <a:bodyPr/>
+          <a:lstStyle/>
+          <a:p>
+            <a:endParaRPr lang="es-CO"/>
+          </a:p>
+        </p:txBody>
       </p:sp>
       <p:pic>
         <p:nvPicPr>
@@ -15930,6 +16347,13 @@
             </a:outerShdw>
           </a:effectLst>
         </p:spPr>
+        <p:txBody>
+          <a:bodyPr/>
+          <a:lstStyle/>
+          <a:p>
+            <a:endParaRPr lang="es-CO"/>
+          </a:p>
+        </p:txBody>
       </p:sp>
       <p:pic>
         <p:nvPicPr>
@@ -16061,6 +16485,13 @@
             </a:outerShdw>
           </a:effectLst>
         </p:spPr>
+        <p:txBody>
+          <a:bodyPr/>
+          <a:lstStyle/>
+          <a:p>
+            <a:endParaRPr lang="es-CO"/>
+          </a:p>
+        </p:txBody>
       </p:sp>
       <p:pic>
         <p:nvPicPr>
@@ -16192,6 +16623,13 @@
             </a:outerShdw>
           </a:effectLst>
         </p:spPr>
+        <p:txBody>
+          <a:bodyPr/>
+          <a:lstStyle/>
+          <a:p>
+            <a:endParaRPr lang="es-CO"/>
+          </a:p>
+        </p:txBody>
       </p:sp>
       <p:pic>
         <p:nvPicPr>
@@ -16323,6 +16761,13 @@
             </a:outerShdw>
           </a:effectLst>
         </p:spPr>
+        <p:txBody>
+          <a:bodyPr/>
+          <a:lstStyle/>
+          <a:p>
+            <a:endParaRPr lang="es-CO"/>
+          </a:p>
+        </p:txBody>
       </p:sp>
       <p:pic>
         <p:nvPicPr>
@@ -16454,6 +16899,13 @@
             </a:outerShdw>
           </a:effectLst>
         </p:spPr>
+        <p:txBody>
+          <a:bodyPr/>
+          <a:lstStyle/>
+          <a:p>
+            <a:endParaRPr lang="es-CO"/>
+          </a:p>
+        </p:txBody>
       </p:sp>
       <p:pic>
         <p:nvPicPr>
@@ -16640,7 +17092,7 @@
                 <a:ea typeface="Calibri" pitchFamily="34" charset="-122"/>
                 <a:cs typeface="Calibri" pitchFamily="34" charset="-120"/>
               </a:rPr>
-              <a:t>19</a:t>
+              <a:t>22</a:t>
             </a:r>
             <a:endParaRPr lang="en-US" sz="850" dirty="0"/>
           </a:p>
@@ -16698,6 +17150,13 @@
           </a:solidFill>
           <a:ln/>
         </p:spPr>
+        <p:txBody>
+          <a:bodyPr/>
+          <a:lstStyle/>
+          <a:p>
+            <a:endParaRPr lang="es-CO"/>
+          </a:p>
+        </p:txBody>
       </p:sp>
       <p:sp>
         <p:nvSpPr>
@@ -17160,6 +17619,13 @@
             </a:outerShdw>
           </a:effectLst>
         </p:spPr>
+        <p:txBody>
+          <a:bodyPr/>
+          <a:lstStyle/>
+          <a:p>
+            <a:endParaRPr lang="es-CO"/>
+          </a:p>
+        </p:txBody>
       </p:sp>
       <p:sp>
         <p:nvSpPr>
@@ -17182,6 +17648,13 @@
           </a:solidFill>
           <a:ln/>
         </p:spPr>
+        <p:txBody>
+          <a:bodyPr/>
+          <a:lstStyle/>
+          <a:p>
+            <a:endParaRPr lang="es-CO"/>
+          </a:p>
+        </p:txBody>
       </p:sp>
       <p:sp>
         <p:nvSpPr>
@@ -17202,6 +17675,13 @@
           </a:solidFill>
           <a:ln/>
         </p:spPr>
+        <p:txBody>
+          <a:bodyPr/>
+          <a:lstStyle/>
+          <a:p>
+            <a:endParaRPr lang="es-CO"/>
+          </a:p>
+        </p:txBody>
       </p:sp>
       <p:pic>
         <p:nvPicPr>
@@ -17455,6 +17935,13 @@
             </a:outerShdw>
           </a:effectLst>
         </p:spPr>
+        <p:txBody>
+          <a:bodyPr/>
+          <a:lstStyle/>
+          <a:p>
+            <a:endParaRPr lang="es-CO"/>
+          </a:p>
+        </p:txBody>
       </p:sp>
       <p:sp>
         <p:nvSpPr>
@@ -17477,6 +17964,13 @@
           </a:solidFill>
           <a:ln/>
         </p:spPr>
+        <p:txBody>
+          <a:bodyPr/>
+          <a:lstStyle/>
+          <a:p>
+            <a:endParaRPr lang="es-CO"/>
+          </a:p>
+        </p:txBody>
       </p:sp>
       <p:sp>
         <p:nvSpPr>
@@ -17497,6 +17991,13 @@
           </a:solidFill>
           <a:ln/>
         </p:spPr>
+        <p:txBody>
+          <a:bodyPr/>
+          <a:lstStyle/>
+          <a:p>
+            <a:endParaRPr lang="es-CO"/>
+          </a:p>
+        </p:txBody>
       </p:sp>
       <p:pic>
         <p:nvPicPr>
@@ -17838,6 +18339,13 @@
             </a:outerShdw>
           </a:effectLst>
         </p:spPr>
+        <p:txBody>
+          <a:bodyPr/>
+          <a:lstStyle/>
+          <a:p>
+            <a:endParaRPr lang="es-CO"/>
+          </a:p>
+        </p:txBody>
       </p:sp>
       <p:sp>
         <p:nvSpPr>
@@ -17860,6 +18368,13 @@
           </a:solidFill>
           <a:ln/>
         </p:spPr>
+        <p:txBody>
+          <a:bodyPr/>
+          <a:lstStyle/>
+          <a:p>
+            <a:endParaRPr lang="es-CO"/>
+          </a:p>
+        </p:txBody>
       </p:sp>
       <p:sp>
         <p:nvSpPr>
@@ -17880,6 +18395,13 @@
           </a:solidFill>
           <a:ln/>
         </p:spPr>
+        <p:txBody>
+          <a:bodyPr/>
+          <a:lstStyle/>
+          <a:p>
+            <a:endParaRPr lang="es-CO"/>
+          </a:p>
+        </p:txBody>
       </p:sp>
       <p:pic>
         <p:nvPicPr>
@@ -18243,6 +18765,13 @@
             </a:outerShdw>
           </a:effectLst>
         </p:spPr>
+        <p:txBody>
+          <a:bodyPr/>
+          <a:lstStyle/>
+          <a:p>
+            <a:endParaRPr lang="es-CO"/>
+          </a:p>
+        </p:txBody>
       </p:sp>
       <p:sp>
         <p:nvSpPr>
@@ -18265,6 +18794,13 @@
           </a:solidFill>
           <a:ln/>
         </p:spPr>
+        <p:txBody>
+          <a:bodyPr/>
+          <a:lstStyle/>
+          <a:p>
+            <a:endParaRPr lang="es-CO"/>
+          </a:p>
+        </p:txBody>
       </p:sp>
       <p:sp>
         <p:nvSpPr>
@@ -18285,6 +18821,13 @@
           </a:solidFill>
           <a:ln/>
         </p:spPr>
+        <p:txBody>
+          <a:bodyPr/>
+          <a:lstStyle/>
+          <a:p>
+            <a:endParaRPr lang="es-CO"/>
+          </a:p>
+        </p:txBody>
       </p:sp>
       <p:pic>
         <p:nvPicPr>
@@ -18744,6 +19287,13 @@
             </a:outerShdw>
           </a:effectLst>
         </p:spPr>
+        <p:txBody>
+          <a:bodyPr/>
+          <a:lstStyle/>
+          <a:p>
+            <a:endParaRPr lang="es-CO"/>
+          </a:p>
+        </p:txBody>
       </p:sp>
       <p:sp>
         <p:nvSpPr>
@@ -18862,6 +19412,13 @@
             </a:outerShdw>
           </a:effectLst>
         </p:spPr>
+        <p:txBody>
+          <a:bodyPr/>
+          <a:lstStyle/>
+          <a:p>
+            <a:endParaRPr lang="es-CO"/>
+          </a:p>
+        </p:txBody>
       </p:sp>
       <p:sp>
         <p:nvSpPr>
@@ -18882,6 +19439,13 @@
           </a:solidFill>
           <a:ln/>
         </p:spPr>
+        <p:txBody>
+          <a:bodyPr/>
+          <a:lstStyle/>
+          <a:p>
+            <a:endParaRPr lang="es-CO"/>
+          </a:p>
+        </p:txBody>
       </p:sp>
       <p:sp>
         <p:nvSpPr>
@@ -18916,7 +19480,7 @@
                 <a:ea typeface="Trebuchet MS" pitchFamily="34" charset="-122"/>
                 <a:cs typeface="Trebuchet MS" pitchFamily="34" charset="-120"/>
               </a:rPr>
-              <a:t>25.357</a:t>
+              <a:t>25.410</a:t>
             </a:r>
             <a:endParaRPr lang="en-US" sz="2600" dirty="0"/>
           </a:p>
@@ -18989,6 +19553,13 @@
             </a:outerShdw>
           </a:effectLst>
         </p:spPr>
+        <p:txBody>
+          <a:bodyPr/>
+          <a:lstStyle/>
+          <a:p>
+            <a:endParaRPr lang="es-CO"/>
+          </a:p>
+        </p:txBody>
       </p:sp>
       <p:sp>
         <p:nvSpPr>
@@ -19009,6 +19580,13 @@
           </a:solidFill>
           <a:ln/>
         </p:spPr>
+        <p:txBody>
+          <a:bodyPr/>
+          <a:lstStyle/>
+          <a:p>
+            <a:endParaRPr lang="es-CO"/>
+          </a:p>
+        </p:txBody>
       </p:sp>
       <p:sp>
         <p:nvSpPr>
@@ -19116,6 +19694,13 @@
             </a:outerShdw>
           </a:effectLst>
         </p:spPr>
+        <p:txBody>
+          <a:bodyPr/>
+          <a:lstStyle/>
+          <a:p>
+            <a:endParaRPr lang="es-CO"/>
+          </a:p>
+        </p:txBody>
       </p:sp>
       <p:sp>
         <p:nvSpPr>
@@ -19136,6 +19721,13 @@
           </a:solidFill>
           <a:ln/>
         </p:spPr>
+        <p:txBody>
+          <a:bodyPr/>
+          <a:lstStyle/>
+          <a:p>
+            <a:endParaRPr lang="es-CO"/>
+          </a:p>
+        </p:txBody>
       </p:sp>
       <p:sp>
         <p:nvSpPr>
@@ -19243,6 +19835,13 @@
             </a:outerShdw>
           </a:effectLst>
         </p:spPr>
+        <p:txBody>
+          <a:bodyPr/>
+          <a:lstStyle/>
+          <a:p>
+            <a:endParaRPr lang="es-CO"/>
+          </a:p>
+        </p:txBody>
       </p:sp>
       <p:sp>
         <p:nvSpPr>
@@ -19263,6 +19862,13 @@
           </a:solidFill>
           <a:ln/>
         </p:spPr>
+        <p:txBody>
+          <a:bodyPr/>
+          <a:lstStyle/>
+          <a:p>
+            <a:endParaRPr lang="es-CO"/>
+          </a:p>
+        </p:txBody>
       </p:sp>
       <p:sp>
         <p:nvSpPr>
@@ -19399,6 +20005,13 @@
             </a:outerShdw>
           </a:effectLst>
         </p:spPr>
+        <p:txBody>
+          <a:bodyPr/>
+          <a:lstStyle/>
+          <a:p>
+            <a:endParaRPr lang="es-CO"/>
+          </a:p>
+        </p:txBody>
       </p:sp>
       <p:sp>
         <p:nvSpPr>
@@ -19494,7 +20107,7 @@
                 <a:ea typeface="Calibri" pitchFamily="34" charset="-122"/>
                 <a:cs typeface="Calibri" pitchFamily="34" charset="-120"/>
               </a:rPr>
-              <a:t>25.357 hoy</a:t>
+              <a:t>25.410 hoy</a:t>
             </a:r>
             <a:endParaRPr lang="en-US" sz="1250" dirty="0"/>
           </a:p>
@@ -19567,6 +20180,13 @@
             </a:outerShdw>
           </a:effectLst>
         </p:spPr>
+        <p:txBody>
+          <a:bodyPr/>
+          <a:lstStyle/>
+          <a:p>
+            <a:endParaRPr lang="es-CO"/>
+          </a:p>
+        </p:txBody>
       </p:sp>
       <p:sp>
         <p:nvSpPr>
@@ -19835,7 +20455,7 @@
                 <a:ea typeface="Calibri" pitchFamily="34" charset="-122"/>
                 <a:cs typeface="Calibri" pitchFamily="34" charset="-120"/>
               </a:rPr>
-              <a:t>Cifras </a:t>
+              <a:t>Cifras en vivo y </a:t>
             </a:r>
             <a:r>
               <a:rPr lang="en-US" sz="950" i="1" dirty="0" err="1">
@@ -19846,7 +20466,7 @@
                 <a:ea typeface="Calibri" pitchFamily="34" charset="-122"/>
                 <a:cs typeface="Calibri" pitchFamily="34" charset="-120"/>
               </a:rPr>
-              <a:t>en</a:t>
+              <a:t>verificables</a:t>
             </a:r>
             <a:r>
               <a:rPr lang="en-US" sz="950" i="1" dirty="0">
@@ -19857,7 +20477,7 @@
                 <a:ea typeface="Calibri" pitchFamily="34" charset="-122"/>
                 <a:cs typeface="Calibri" pitchFamily="34" charset="-120"/>
               </a:rPr>
-              <a:t> vivo y </a:t>
+              <a:t> · 11.039.185 </a:t>
             </a:r>
             <a:r>
               <a:rPr lang="en-US" sz="950" i="1" dirty="0" err="1">
@@ -19868,7 +20488,84 @@
                 <a:ea typeface="Calibri" pitchFamily="34" charset="-122"/>
                 <a:cs typeface="Calibri" pitchFamily="34" charset="-120"/>
               </a:rPr>
-              <a:t>verificables · 10.991.897 descargas acumuladas · 4.018.725 vistas/mes · corte 23 de julio de 2026</a:t>
+              <a:t>descargas</a:t>
+            </a:r>
+            <a:r>
+              <a:rPr lang="en-US" sz="950" i="1" dirty="0">
+                <a:solidFill>
+                  <a:srgbClr val="7F8C8D"/>
+                </a:solidFill>
+                <a:latin typeface="Calibri" pitchFamily="34" charset="0"/>
+                <a:ea typeface="Calibri" pitchFamily="34" charset="-122"/>
+                <a:cs typeface="Calibri" pitchFamily="34" charset="-120"/>
+              </a:rPr>
+              <a:t> </a:t>
+            </a:r>
+            <a:r>
+              <a:rPr lang="en-US" sz="950" i="1" dirty="0" err="1">
+                <a:solidFill>
+                  <a:srgbClr val="7F8C8D"/>
+                </a:solidFill>
+                <a:latin typeface="Calibri" pitchFamily="34" charset="0"/>
+                <a:ea typeface="Calibri" pitchFamily="34" charset="-122"/>
+                <a:cs typeface="Calibri" pitchFamily="34" charset="-120"/>
+              </a:rPr>
+              <a:t>acumuladas</a:t>
+            </a:r>
+            <a:r>
+              <a:rPr lang="en-US" sz="950" i="1" dirty="0">
+                <a:solidFill>
+                  <a:srgbClr val="7F8C8D"/>
+                </a:solidFill>
+                <a:latin typeface="Calibri" pitchFamily="34" charset="0"/>
+                <a:ea typeface="Calibri" pitchFamily="34" charset="-122"/>
+                <a:cs typeface="Calibri" pitchFamily="34" charset="-120"/>
+              </a:rPr>
+              <a:t> · 3.972.184 vistas/</a:t>
+            </a:r>
+            <a:r>
+              <a:rPr lang="en-US" sz="950" i="1" dirty="0" err="1">
+                <a:solidFill>
+                  <a:srgbClr val="7F8C8D"/>
+                </a:solidFill>
+                <a:latin typeface="Calibri" pitchFamily="34" charset="0"/>
+                <a:ea typeface="Calibri" pitchFamily="34" charset="-122"/>
+                <a:cs typeface="Calibri" pitchFamily="34" charset="-120"/>
+              </a:rPr>
+              <a:t>mes</a:t>
+            </a:r>
+            <a:r>
+              <a:rPr lang="en-US" sz="950" i="1" dirty="0">
+                <a:solidFill>
+                  <a:srgbClr val="7F8C8D"/>
+                </a:solidFill>
+                <a:latin typeface="Calibri" pitchFamily="34" charset="0"/>
+                <a:ea typeface="Calibri" pitchFamily="34" charset="-122"/>
+                <a:cs typeface="Calibri" pitchFamily="34" charset="-120"/>
+              </a:rPr>
+              <a:t> · corte 26 de </a:t>
+            </a:r>
+            <a:r>
+              <a:rPr lang="en-US" sz="950" i="1" dirty="0" err="1">
+                <a:solidFill>
+                  <a:srgbClr val="7F8C8D"/>
+                </a:solidFill>
+                <a:latin typeface="Calibri" pitchFamily="34" charset="0"/>
+                <a:ea typeface="Calibri" pitchFamily="34" charset="-122"/>
+                <a:cs typeface="Calibri" pitchFamily="34" charset="-120"/>
+              </a:rPr>
+              <a:t>julio</a:t>
+            </a:r>
+            <a:r>
+              <a:rPr lang="en-US" sz="950" i="1" dirty="0">
+                <a:solidFill>
+                  <a:srgbClr val="7F8C8D"/>
+                </a:solidFill>
+                <a:latin typeface="Calibri" pitchFamily="34" charset="0"/>
+                <a:ea typeface="Calibri" pitchFamily="34" charset="-122"/>
+                <a:cs typeface="Calibri" pitchFamily="34" charset="-120"/>
+              </a:rPr>
+              <a:t> de 2026</a:t>
             </a:r>
             <a:endParaRPr lang="en-US" sz="950" dirty="0"/>
           </a:p>
@@ -20174,6 +20871,13 @@
             </a:outerShdw>
           </a:effectLst>
         </p:spPr>
+        <p:txBody>
+          <a:bodyPr/>
+          <a:lstStyle/>
+          <a:p>
+            <a:endParaRPr lang="es-CO"/>
+          </a:p>
+        </p:txBody>
       </p:sp>
       <p:pic>
         <p:nvPicPr>
@@ -20305,6 +21009,13 @@
             </a:outerShdw>
           </a:effectLst>
         </p:spPr>
+        <p:txBody>
+          <a:bodyPr/>
+          <a:lstStyle/>
+          <a:p>
+            <a:endParaRPr lang="es-CO"/>
+          </a:p>
+        </p:txBody>
       </p:sp>
       <p:pic>
         <p:nvPicPr>
@@ -20436,6 +21147,13 @@
             </a:outerShdw>
           </a:effectLst>
         </p:spPr>
+        <p:txBody>
+          <a:bodyPr/>
+          <a:lstStyle/>
+          <a:p>
+            <a:endParaRPr lang="es-CO"/>
+          </a:p>
+        </p:txBody>
       </p:sp>
       <p:pic>
         <p:nvPicPr>
@@ -20655,6 +21373,13 @@
             </a:outerShdw>
           </a:effectLst>
         </p:spPr>
+        <p:txBody>
+          <a:bodyPr/>
+          <a:lstStyle/>
+          <a:p>
+            <a:endParaRPr lang="es-CO"/>
+          </a:p>
+        </p:txBody>
       </p:sp>
       <p:pic>
         <p:nvPicPr>
@@ -21156,6 +21881,13 @@
           </a:solidFill>
           <a:ln/>
         </p:spPr>
+        <p:txBody>
+          <a:bodyPr/>
+          <a:lstStyle/>
+          <a:p>
+            <a:endParaRPr lang="es-CO"/>
+          </a:p>
+        </p:txBody>
       </p:sp>
       <p:sp>
         <p:nvSpPr>
@@ -21176,6 +21908,13 @@
           </a:solidFill>
           <a:ln/>
         </p:spPr>
+        <p:txBody>
+          <a:bodyPr/>
+          <a:lstStyle/>
+          <a:p>
+            <a:endParaRPr lang="es-CO"/>
+          </a:p>
+        </p:txBody>
       </p:sp>
       <p:sp>
         <p:nvSpPr>
@@ -21315,6 +22054,13 @@
           </a:solidFill>
           <a:ln/>
         </p:spPr>
+        <p:txBody>
+          <a:bodyPr/>
+          <a:lstStyle/>
+          <a:p>
+            <a:endParaRPr lang="es-CO"/>
+          </a:p>
+        </p:txBody>
       </p:sp>
       <p:sp>
         <p:nvSpPr>
@@ -21335,6 +22081,13 @@
           </a:solidFill>
           <a:ln/>
         </p:spPr>
+        <p:txBody>
+          <a:bodyPr/>
+          <a:lstStyle/>
+          <a:p>
+            <a:endParaRPr lang="es-CO"/>
+          </a:p>
+        </p:txBody>
       </p:sp>
       <p:sp>
         <p:nvSpPr>
@@ -21474,6 +22227,13 @@
           </a:solidFill>
           <a:ln/>
         </p:spPr>
+        <p:txBody>
+          <a:bodyPr/>
+          <a:lstStyle/>
+          <a:p>
+            <a:endParaRPr lang="es-CO"/>
+          </a:p>
+        </p:txBody>
       </p:sp>
       <p:sp>
         <p:nvSpPr>
@@ -21494,6 +22254,13 @@
           </a:solidFill>
           <a:ln/>
         </p:spPr>
+        <p:txBody>
+          <a:bodyPr/>
+          <a:lstStyle/>
+          <a:p>
+            <a:endParaRPr lang="es-CO"/>
+          </a:p>
+        </p:txBody>
       </p:sp>
       <p:sp>
         <p:nvSpPr>
@@ -21633,6 +22400,13 @@
           </a:solidFill>
           <a:ln/>
         </p:spPr>
+        <p:txBody>
+          <a:bodyPr/>
+          <a:lstStyle/>
+          <a:p>
+            <a:endParaRPr lang="es-CO"/>
+          </a:p>
+        </p:txBody>
       </p:sp>
       <p:sp>
         <p:nvSpPr>
@@ -21653,6 +22427,13 @@
           </a:solidFill>
           <a:ln/>
         </p:spPr>
+        <p:txBody>
+          <a:bodyPr/>
+          <a:lstStyle/>
+          <a:p>
+            <a:endParaRPr lang="es-CO"/>
+          </a:p>
+        </p:txBody>
       </p:sp>
       <p:sp>
         <p:nvSpPr>
@@ -21792,6 +22573,13 @@
           </a:solidFill>
           <a:ln/>
         </p:spPr>
+        <p:txBody>
+          <a:bodyPr/>
+          <a:lstStyle/>
+          <a:p>
+            <a:endParaRPr lang="es-CO"/>
+          </a:p>
+        </p:txBody>
       </p:sp>
       <p:sp>
         <p:nvSpPr>
@@ -21812,6 +22600,13 @@
           </a:solidFill>
           <a:ln/>
         </p:spPr>
+        <p:txBody>
+          <a:bodyPr/>
+          <a:lstStyle/>
+          <a:p>
+            <a:endParaRPr lang="es-CO"/>
+          </a:p>
+        </p:txBody>
       </p:sp>
       <p:sp>
         <p:nvSpPr>
@@ -21951,6 +22746,13 @@
           </a:solidFill>
           <a:ln/>
         </p:spPr>
+        <p:txBody>
+          <a:bodyPr/>
+          <a:lstStyle/>
+          <a:p>
+            <a:endParaRPr lang="es-CO"/>
+          </a:p>
+        </p:txBody>
       </p:sp>
       <p:sp>
         <p:nvSpPr>
@@ -21971,6 +22773,13 @@
           </a:solidFill>
           <a:ln/>
         </p:spPr>
+        <p:txBody>
+          <a:bodyPr/>
+          <a:lstStyle/>
+          <a:p>
+            <a:endParaRPr lang="es-CO"/>
+          </a:p>
+        </p:txBody>
       </p:sp>
       <p:sp>
         <p:nvSpPr>
@@ -22625,6 +23434,13 @@
           </a:solidFill>
           <a:ln/>
         </p:spPr>
+        <p:txBody>
+          <a:bodyPr/>
+          <a:lstStyle/>
+          <a:p>
+            <a:endParaRPr lang="es-CO"/>
+          </a:p>
+        </p:txBody>
       </p:sp>
       <p:sp>
         <p:nvSpPr>
@@ -22645,6 +23461,13 @@
           </a:solidFill>
           <a:ln/>
         </p:spPr>
+        <p:txBody>
+          <a:bodyPr/>
+          <a:lstStyle/>
+          <a:p>
+            <a:endParaRPr lang="es-CO"/>
+          </a:p>
+        </p:txBody>
       </p:sp>
       <p:sp>
         <p:nvSpPr>
@@ -22955,6 +23778,13 @@
           </a:solidFill>
           <a:ln/>
         </p:spPr>
+        <p:txBody>
+          <a:bodyPr/>
+          <a:lstStyle/>
+          <a:p>
+            <a:endParaRPr lang="es-CO"/>
+          </a:p>
+        </p:txBody>
       </p:sp>
       <p:sp>
         <p:nvSpPr>
@@ -22975,6 +23805,13 @@
           </a:solidFill>
           <a:ln/>
         </p:spPr>
+        <p:txBody>
+          <a:bodyPr/>
+          <a:lstStyle/>
+          <a:p>
+            <a:endParaRPr lang="es-CO"/>
+          </a:p>
+        </p:txBody>
       </p:sp>
       <p:sp>
         <p:nvSpPr>
@@ -23285,6 +24122,13 @@
           </a:solidFill>
           <a:ln/>
         </p:spPr>
+        <p:txBody>
+          <a:bodyPr/>
+          <a:lstStyle/>
+          <a:p>
+            <a:endParaRPr lang="es-CO"/>
+          </a:p>
+        </p:txBody>
       </p:sp>
       <p:sp>
         <p:nvSpPr>
@@ -23305,6 +24149,13 @@
           </a:solidFill>
           <a:ln/>
         </p:spPr>
+        <p:txBody>
+          <a:bodyPr/>
+          <a:lstStyle/>
+          <a:p>
+            <a:endParaRPr lang="es-CO"/>
+          </a:p>
+        </p:txBody>
       </p:sp>
       <p:sp>
         <p:nvSpPr>
@@ -23615,6 +24466,13 @@
           </a:solidFill>
           <a:ln/>
         </p:spPr>
+        <p:txBody>
+          <a:bodyPr/>
+          <a:lstStyle/>
+          <a:p>
+            <a:endParaRPr lang="es-CO"/>
+          </a:p>
+        </p:txBody>
       </p:sp>
       <p:sp>
         <p:nvSpPr>
@@ -23635,6 +24493,13 @@
           </a:solidFill>
           <a:ln/>
         </p:spPr>
+        <p:txBody>
+          <a:bodyPr/>
+          <a:lstStyle/>
+          <a:p>
+            <a:endParaRPr lang="es-CO"/>
+          </a:p>
+        </p:txBody>
       </p:sp>
       <p:sp>
         <p:nvSpPr>
@@ -24145,6 +25010,13 @@
           </a:solidFill>
           <a:ln/>
         </p:spPr>
+        <p:txBody>
+          <a:bodyPr/>
+          <a:lstStyle/>
+          <a:p>
+            <a:endParaRPr lang="es-CO"/>
+          </a:p>
+        </p:txBody>
       </p:sp>
       <p:sp>
         <p:nvSpPr>
@@ -24213,6 +25085,13 @@
             </a:outerShdw>
           </a:effectLst>
         </p:spPr>
+        <p:txBody>
+          <a:bodyPr/>
+          <a:lstStyle/>
+          <a:p>
+            <a:endParaRPr lang="es-CO"/>
+          </a:p>
+        </p:txBody>
       </p:sp>
       <p:sp>
         <p:nvSpPr>
@@ -24596,6 +25475,13 @@
             </a:outerShdw>
           </a:effectLst>
         </p:spPr>
+        <p:txBody>
+          <a:bodyPr/>
+          <a:lstStyle/>
+          <a:p>
+            <a:endParaRPr lang="es-CO"/>
+          </a:p>
+        </p:txBody>
       </p:sp>
       <p:sp>
         <p:nvSpPr>
@@ -24979,6 +25865,13 @@
             </a:outerShdw>
           </a:effectLst>
         </p:spPr>
+        <p:txBody>
+          <a:bodyPr/>
+          <a:lstStyle/>
+          <a:p>
+            <a:endParaRPr lang="es-CO"/>
+          </a:p>
+        </p:txBody>
       </p:sp>
       <p:sp>
         <p:nvSpPr>
@@ -25417,7 +26310,7 @@
                 <a:ea typeface="Calibri" pitchFamily="34" charset="-122"/>
                 <a:cs typeface="Calibri" pitchFamily="34" charset="-120"/>
               </a:rPr>
-              <a:t>08</a:t>
+              <a:t>09</a:t>
             </a:r>
             <a:endParaRPr lang="en-US" sz="850" dirty="0"/>
           </a:p>

--- a/recursos/presentacion_v5.pptx
+++ b/recursos/presentacion_v5.pptx
@@ -2906,6 +2906,14 @@
   <p:clrMapOvr>
     <a:masterClrMapping/>
   </p:clrMapOvr>
+  <mc:AlternateContent xmlns:mc="http://schemas.openxmlformats.org/markup-compatibility/2006">
+    <mc:Choice xmlns:p14="http://schemas.microsoft.com/office/powerpoint/2010/main" Requires="p14">
+      <p:transition spd="slow" p14:dur="2000" advTm="9991"/>
+    </mc:Choice>
+    <mc:Fallback>
+      <p:transition spd="slow" advTm="9991"/>
+    </mc:Fallback>
+  </mc:AlternateContent>
 </p:sld>
 </file>
 
@@ -9145,7 +9153,29 @@
                 <a:ea typeface="Calibri" pitchFamily="34" charset="-122"/>
                 <a:cs typeface="Calibri" pitchFamily="34" charset="-120"/>
               </a:rPr>
-              <a:t>emd6-ef7x Establecimientos Educativos (“1.721 colegios oficiales de 2.184 en Boyacá”) · qpq9-e4ne en el ejemplo de cruce del MCP. La solución consulta cualquiera de los 25.357.</a:t>
+              <a:t>emd6-ef7x Establecimientos Educativos (“1.721 colegios oficiales de 2.184 en Boyacá”) · qpq9-e4ne en el ejemplo de cruce del MCP. La solución consulta cualquiera de </a:t>
+            </a:r>
+            <a:r>
+              <a:rPr lang="en-US" sz="900" dirty="0" err="1">
+                <a:solidFill>
+                  <a:srgbClr val="2C3E50"/>
+                </a:solidFill>
+                <a:latin typeface="Calibri" pitchFamily="34" charset="0"/>
+                <a:ea typeface="Calibri" pitchFamily="34" charset="-122"/>
+                <a:cs typeface="Calibri" pitchFamily="34" charset="-120"/>
+              </a:rPr>
+              <a:t>los</a:t>
+            </a:r>
+            <a:r>
+              <a:rPr lang="en-US" sz="900" dirty="0">
+                <a:solidFill>
+                  <a:srgbClr val="2C3E50"/>
+                </a:solidFill>
+                <a:latin typeface="Calibri" pitchFamily="34" charset="0"/>
+                <a:ea typeface="Calibri" pitchFamily="34" charset="-122"/>
+                <a:cs typeface="Calibri" pitchFamily="34" charset="-120"/>
+              </a:rPr>
+              <a:t> 25.410.</a:t>
             </a:r>
             <a:endParaRPr lang="en-US" sz="900" dirty="0"/>
           </a:p>
@@ -11055,588 +11085,6 @@
       </p:grpSpPr>
       <p:sp>
         <p:nvSpPr>
-          <p:cNvPr id="2" name="Text 0"/>
-          <p:cNvSpPr/>
-          <p:nvPr/>
-        </p:nvSpPr>
-        <p:spPr>
-          <a:xfrm>
-            <a:off x="502920" y="1051560"/>
-            <a:ext cx="5303520" cy="777240"/>
-          </a:xfrm>
-          <a:prstGeom prst="rect">
-            <a:avLst/>
-          </a:prstGeom>
-          <a:noFill/>
-          <a:ln/>
-        </p:spPr>
-        <p:txBody>
-          <a:bodyPr wrap="square" lIns="0" tIns="0" rIns="0" bIns="0" rtlCol="0" anchor="ctr"/>
-          <a:lstStyle/>
-          <a:p>
-            <a:pPr marL="0" indent="0">
-              <a:buNone/>
-            </a:pPr>
-            <a:r>
-              <a:rPr lang="en-US" sz="4600" b="1" dirty="0">
-                <a:solidFill>
-                  <a:srgbClr val="FFFFFF"/>
-                </a:solidFill>
-                <a:latin typeface="Trebuchet MS" pitchFamily="34" charset="0"/>
-                <a:ea typeface="Trebuchet MS" pitchFamily="34" charset="-122"/>
-                <a:cs typeface="Trebuchet MS" pitchFamily="34" charset="-120"/>
-              </a:rPr>
-              <a:t>datosvivos.co</a:t>
-            </a:r>
-            <a:endParaRPr lang="en-US" sz="4600" dirty="0"/>
-          </a:p>
-        </p:txBody>
-      </p:sp>
-      <p:sp>
-        <p:nvSpPr>
-          <p:cNvPr id="3" name="Text 1"/>
-          <p:cNvSpPr/>
-          <p:nvPr/>
-        </p:nvSpPr>
-        <p:spPr>
-          <a:xfrm>
-            <a:off x="502920" y="1874520"/>
-            <a:ext cx="5120640" cy="594360"/>
-          </a:xfrm>
-          <a:prstGeom prst="rect">
-            <a:avLst/>
-          </a:prstGeom>
-          <a:noFill/>
-          <a:ln/>
-        </p:spPr>
-        <p:txBody>
-          <a:bodyPr wrap="square" lIns="0" tIns="0" rIns="0" bIns="0" rtlCol="0" anchor="ctr"/>
-          <a:lstStyle/>
-          <a:p>
-            <a:pPr marL="0" indent="0">
-              <a:buNone/>
-            </a:pPr>
-            <a:r>
-              <a:rPr lang="en-US" sz="1400" dirty="0">
-                <a:solidFill>
-                  <a:srgbClr val="AEC6D8"/>
-                </a:solidFill>
-                <a:latin typeface="Calibri" pitchFamily="34" charset="0"/>
-                <a:ea typeface="Calibri" pitchFamily="34" charset="-122"/>
-                <a:cs typeface="Calibri" pitchFamily="34" charset="-120"/>
-              </a:rPr>
-              <a:t>El panorama de los datos abiertos de Colombia.</a:t>
-            </a:r>
-            <a:endParaRPr lang="en-US" sz="1400" dirty="0"/>
-          </a:p>
-          <a:p>
-            <a:pPr marL="0" indent="0">
-              <a:buNone/>
-            </a:pPr>
-            <a:r>
-              <a:rPr lang="en-US" sz="1400" dirty="0">
-                <a:solidFill>
-                  <a:srgbClr val="AEC6D8"/>
-                </a:solidFill>
-                <a:latin typeface="Calibri" pitchFamily="34" charset="0"/>
-                <a:ea typeface="Calibri" pitchFamily="34" charset="-122"/>
-                <a:cs typeface="Calibri" pitchFamily="34" charset="-120"/>
-              </a:rPr>
-              <a:t>En vivo, verificable, para decidir.</a:t>
-            </a:r>
-            <a:endParaRPr lang="en-US" sz="1400" dirty="0"/>
-          </a:p>
-        </p:txBody>
-      </p:sp>
-      <p:sp>
-        <p:nvSpPr>
-          <p:cNvPr id="4" name="Shape 2"/>
-          <p:cNvSpPr/>
-          <p:nvPr/>
-        </p:nvSpPr>
-        <p:spPr>
-          <a:xfrm>
-            <a:off x="502920" y="2606040"/>
-            <a:ext cx="4206240" cy="27432"/>
-          </a:xfrm>
-          <a:prstGeom prst="rect">
-            <a:avLst/>
-          </a:prstGeom>
-          <a:solidFill>
-            <a:srgbClr val="1ABC9C"/>
-          </a:solidFill>
-          <a:ln/>
-        </p:spPr>
-        <p:txBody>
-          <a:bodyPr/>
-          <a:lstStyle/>
-          <a:p>
-            <a:endParaRPr lang="es-CO"/>
-          </a:p>
-        </p:txBody>
-      </p:sp>
-      <p:pic>
-        <p:nvPicPr>
-          <p:cNvPr id="5" name="Image 0" descr="preencoded.png"/>
-          <p:cNvPicPr>
-            <a:picLocks noChangeAspect="1"/>
-          </p:cNvPicPr>
-          <p:nvPr/>
-        </p:nvPicPr>
-        <p:blipFill>
-          <a:blip r:embed="rId3"/>
-          <a:stretch>
-            <a:fillRect/>
-          </a:stretch>
-        </p:blipFill>
-        <p:spPr>
-          <a:xfrm>
-            <a:off x="502920" y="2916936"/>
-            <a:ext cx="201168" cy="201168"/>
-          </a:xfrm>
-          <a:prstGeom prst="rect">
-            <a:avLst/>
-          </a:prstGeom>
-        </p:spPr>
-      </p:pic>
-      <p:sp>
-        <p:nvSpPr>
-          <p:cNvPr id="6" name="Text 3"/>
-          <p:cNvSpPr/>
-          <p:nvPr/>
-        </p:nvSpPr>
-        <p:spPr>
-          <a:xfrm>
-            <a:off x="850392" y="2880360"/>
-            <a:ext cx="4754880" cy="292608"/>
-          </a:xfrm>
-          <a:prstGeom prst="rect">
-            <a:avLst/>
-          </a:prstGeom>
-          <a:noFill/>
-          <a:ln/>
-        </p:spPr>
-        <p:txBody>
-          <a:bodyPr wrap="square" lIns="0" tIns="0" rIns="0" bIns="0" rtlCol="0" anchor="ctr"/>
-          <a:lstStyle/>
-          <a:p>
-            <a:r>
-              <a:rPr lang="en-US" sz="1250" b="1" dirty="0">
-                <a:solidFill>
-                  <a:srgbClr val="FFFFFF"/>
-                </a:solidFill>
-                <a:latin typeface="Calibri" pitchFamily="34" charset="0"/>
-                <a:ea typeface="Calibri" pitchFamily="34" charset="-122"/>
-                <a:cs typeface="Calibri" pitchFamily="34" charset="-120"/>
-              </a:rPr>
-              <a:t>Jhonatan Rico </a:t>
-            </a:r>
-            <a:r>
-              <a:rPr lang="en-US" sz="1250" dirty="0">
-                <a:solidFill>
-                  <a:srgbClr val="9FB3C8"/>
-                </a:solidFill>
-                <a:latin typeface="Calibri" pitchFamily="34" charset="0"/>
-                <a:ea typeface="Calibri" pitchFamily="34" charset="-122"/>
-                <a:cs typeface="Calibri" pitchFamily="34" charset="-120"/>
-              </a:rPr>
-              <a:t>·</a:t>
-            </a:r>
-            <a:r>
-              <a:rPr lang="en-US" sz="1250" b="1" dirty="0">
-                <a:solidFill>
-                  <a:srgbClr val="FFFFFF"/>
-                </a:solidFill>
-                <a:latin typeface="Calibri" pitchFamily="34" charset="0"/>
-                <a:ea typeface="Calibri" pitchFamily="34" charset="-122"/>
-                <a:cs typeface="Calibri" pitchFamily="34" charset="-120"/>
-              </a:rPr>
-              <a:t> </a:t>
-            </a:r>
-            <a:r>
-              <a:rPr lang="en-US" sz="1250" dirty="0" err="1">
-                <a:solidFill>
-                  <a:srgbClr val="9FB3C8"/>
-                </a:solidFill>
-                <a:latin typeface="Calibri" pitchFamily="34" charset="0"/>
-                <a:ea typeface="Calibri" pitchFamily="34" charset="-122"/>
-                <a:cs typeface="Calibri" pitchFamily="34" charset="-120"/>
-              </a:rPr>
-              <a:t>jrico@ani.gov.co</a:t>
-            </a:r>
-            <a:r>
-              <a:rPr lang="en-US" sz="1250" dirty="0">
-                <a:solidFill>
-                  <a:srgbClr val="9FB3C8"/>
-                </a:solidFill>
-                <a:latin typeface="Calibri" pitchFamily="34" charset="0"/>
-                <a:ea typeface="Calibri" pitchFamily="34" charset="-122"/>
-                <a:cs typeface="Calibri" pitchFamily="34" charset="-120"/>
-              </a:rPr>
-              <a:t>  · 310 419 6100</a:t>
-            </a:r>
-            <a:endParaRPr lang="en-US" sz="1250" dirty="0"/>
-          </a:p>
-        </p:txBody>
-      </p:sp>
-      <p:pic>
-        <p:nvPicPr>
-          <p:cNvPr id="7" name="Image 1" descr="preencoded.png"/>
-          <p:cNvPicPr>
-            <a:picLocks noChangeAspect="1"/>
-          </p:cNvPicPr>
-          <p:nvPr/>
-        </p:nvPicPr>
-        <p:blipFill>
-          <a:blip r:embed="rId3"/>
-          <a:stretch>
-            <a:fillRect/>
-          </a:stretch>
-        </p:blipFill>
-        <p:spPr>
-          <a:xfrm>
-            <a:off x="502920" y="3300984"/>
-            <a:ext cx="201168" cy="201168"/>
-          </a:xfrm>
-          <a:prstGeom prst="rect">
-            <a:avLst/>
-          </a:prstGeom>
-        </p:spPr>
-      </p:pic>
-      <p:sp>
-        <p:nvSpPr>
-          <p:cNvPr id="8" name="Text 4"/>
-          <p:cNvSpPr/>
-          <p:nvPr/>
-        </p:nvSpPr>
-        <p:spPr>
-          <a:xfrm>
-            <a:off x="850392" y="3264408"/>
-            <a:ext cx="4754880" cy="292608"/>
-          </a:xfrm>
-          <a:prstGeom prst="rect">
-            <a:avLst/>
-          </a:prstGeom>
-          <a:noFill/>
-          <a:ln/>
-        </p:spPr>
-        <p:txBody>
-          <a:bodyPr wrap="square" lIns="0" tIns="0" rIns="0" bIns="0" rtlCol="0" anchor="ctr"/>
-          <a:lstStyle/>
-          <a:p>
-            <a:r>
-              <a:rPr lang="en-US" sz="1250" b="1" dirty="0">
-                <a:solidFill>
-                  <a:srgbClr val="FFFFFF"/>
-                </a:solidFill>
-                <a:latin typeface="Calibri" pitchFamily="34" charset="0"/>
-                <a:ea typeface="Calibri" pitchFamily="34" charset="-122"/>
-                <a:cs typeface="Calibri" pitchFamily="34" charset="-120"/>
-              </a:rPr>
-              <a:t>Andrea Navarro </a:t>
-            </a:r>
-            <a:r>
-              <a:rPr lang="en-US" sz="1250" dirty="0">
-                <a:solidFill>
-                  <a:srgbClr val="9FB3C8"/>
-                </a:solidFill>
-                <a:latin typeface="Calibri" pitchFamily="34" charset="0"/>
-                <a:ea typeface="Calibri" pitchFamily="34" charset="-122"/>
-                <a:cs typeface="Calibri" pitchFamily="34" charset="-120"/>
-              </a:rPr>
-              <a:t>·</a:t>
-            </a:r>
-            <a:r>
-              <a:rPr lang="en-US" sz="1250" b="1" dirty="0">
-                <a:solidFill>
-                  <a:srgbClr val="FFFFFF"/>
-                </a:solidFill>
-                <a:latin typeface="Calibri" pitchFamily="34" charset="0"/>
-                <a:ea typeface="Calibri" pitchFamily="34" charset="-122"/>
-                <a:cs typeface="Calibri" pitchFamily="34" charset="-120"/>
-              </a:rPr>
-              <a:t> </a:t>
-            </a:r>
-            <a:r>
-              <a:rPr lang="en-US" sz="1250" dirty="0">
-                <a:solidFill>
-                  <a:srgbClr val="9FB3C8"/>
-                </a:solidFill>
-                <a:latin typeface="Calibri" pitchFamily="34" charset="0"/>
-                <a:ea typeface="Calibri" pitchFamily="34" charset="-122"/>
-                <a:cs typeface="Calibri" pitchFamily="34" charset="-120"/>
-              </a:rPr>
-              <a:t>inavarro@ani.gov.co</a:t>
-            </a:r>
-            <a:endParaRPr lang="en-US" sz="1250" dirty="0"/>
-          </a:p>
-        </p:txBody>
-      </p:sp>
-      <p:pic>
-        <p:nvPicPr>
-          <p:cNvPr id="9" name="Image 2" descr="preencoded.png"/>
-          <p:cNvPicPr>
-            <a:picLocks noChangeAspect="1"/>
-          </p:cNvPicPr>
-          <p:nvPr/>
-        </p:nvPicPr>
-        <p:blipFill>
-          <a:blip r:embed="rId3"/>
-          <a:stretch>
-            <a:fillRect/>
-          </a:stretch>
-        </p:blipFill>
-        <p:spPr>
-          <a:xfrm>
-            <a:off x="502920" y="3685032"/>
-            <a:ext cx="201168" cy="201168"/>
-          </a:xfrm>
-          <a:prstGeom prst="rect">
-            <a:avLst/>
-          </a:prstGeom>
-        </p:spPr>
-      </p:pic>
-      <p:sp>
-        <p:nvSpPr>
-          <p:cNvPr id="10" name="Text 5"/>
-          <p:cNvSpPr/>
-          <p:nvPr/>
-        </p:nvSpPr>
-        <p:spPr>
-          <a:xfrm>
-            <a:off x="850392" y="3648456"/>
-            <a:ext cx="4754880" cy="292608"/>
-          </a:xfrm>
-          <a:prstGeom prst="rect">
-            <a:avLst/>
-          </a:prstGeom>
-          <a:noFill/>
-          <a:ln/>
-        </p:spPr>
-        <p:txBody>
-          <a:bodyPr wrap="square" lIns="0" tIns="0" rIns="0" bIns="0" rtlCol="0" anchor="ctr"/>
-          <a:lstStyle/>
-          <a:p>
-            <a:r>
-              <a:rPr lang="en-US" sz="1250" b="1" dirty="0">
-                <a:solidFill>
-                  <a:srgbClr val="FFFFFF"/>
-                </a:solidFill>
-                <a:latin typeface="Calibri" pitchFamily="34" charset="0"/>
-                <a:ea typeface="Calibri" pitchFamily="34" charset="-122"/>
-                <a:cs typeface="Calibri" pitchFamily="34" charset="-120"/>
-              </a:rPr>
-              <a:t>Hernán Gutiérrez  </a:t>
-            </a:r>
-            <a:r>
-              <a:rPr lang="en-US" sz="1250" dirty="0">
-                <a:solidFill>
-                  <a:srgbClr val="9FB3C8"/>
-                </a:solidFill>
-                <a:latin typeface="Calibri" pitchFamily="34" charset="0"/>
-                <a:ea typeface="Calibri" pitchFamily="34" charset="-122"/>
-                <a:cs typeface="Calibri" pitchFamily="34" charset="-120"/>
-              </a:rPr>
-              <a:t>·</a:t>
-            </a:r>
-            <a:r>
-              <a:rPr lang="en-US" sz="1250" b="1" dirty="0">
-                <a:solidFill>
-                  <a:srgbClr val="FFFFFF"/>
-                </a:solidFill>
-                <a:latin typeface="Calibri" pitchFamily="34" charset="0"/>
-                <a:ea typeface="Calibri" pitchFamily="34" charset="-122"/>
-                <a:cs typeface="Calibri" pitchFamily="34" charset="-120"/>
-              </a:rPr>
-              <a:t> </a:t>
-            </a:r>
-            <a:r>
-              <a:rPr lang="en-US" sz="1250" dirty="0">
-                <a:solidFill>
-                  <a:srgbClr val="9FB3C8"/>
-                </a:solidFill>
-                <a:latin typeface="Calibri" pitchFamily="34" charset="0"/>
-                <a:ea typeface="Calibri" pitchFamily="34" charset="-122"/>
-                <a:cs typeface="Calibri" pitchFamily="34" charset="-120"/>
-              </a:rPr>
-              <a:t>hgutierrez@ani.gov.co</a:t>
-            </a:r>
-            <a:endParaRPr lang="en-US" sz="1250" dirty="0"/>
-          </a:p>
-        </p:txBody>
-      </p:sp>
-      <p:sp>
-        <p:nvSpPr>
-          <p:cNvPr id="11" name="Text 6"/>
-          <p:cNvSpPr/>
-          <p:nvPr/>
-        </p:nvSpPr>
-        <p:spPr>
-          <a:xfrm>
-            <a:off x="502920" y="4160520"/>
-            <a:ext cx="5120640" cy="274320"/>
-          </a:xfrm>
-          <a:prstGeom prst="rect">
-            <a:avLst/>
-          </a:prstGeom>
-          <a:noFill/>
-          <a:ln/>
-        </p:spPr>
-        <p:txBody>
-          <a:bodyPr wrap="square" lIns="0" tIns="0" rIns="0" bIns="0" rtlCol="0" anchor="ctr"/>
-          <a:lstStyle/>
-          <a:p>
-            <a:pPr marL="0" indent="0">
-              <a:buNone/>
-            </a:pPr>
-            <a:r>
-              <a:rPr lang="en-US" sz="1050" dirty="0">
-                <a:solidFill>
-                  <a:srgbClr val="9FB3C8"/>
-                </a:solidFill>
-                <a:latin typeface="Calibri" pitchFamily="34" charset="0"/>
-                <a:ea typeface="Calibri" pitchFamily="34" charset="-122"/>
-                <a:cs typeface="Calibri" pitchFamily="34" charset="-120"/>
-              </a:rPr>
-              <a:t>Equipo GIT TIC — Agencia Nacional de Infraestructura (ANI)</a:t>
-            </a:r>
-            <a:endParaRPr lang="en-US" sz="1050" dirty="0"/>
-          </a:p>
-        </p:txBody>
-      </p:sp>
-      <p:sp>
-        <p:nvSpPr>
-          <p:cNvPr id="12" name="Text 7"/>
-          <p:cNvSpPr/>
-          <p:nvPr/>
-        </p:nvSpPr>
-        <p:spPr>
-          <a:xfrm>
-            <a:off x="5806440" y="1329889"/>
-            <a:ext cx="2377440" cy="292608"/>
-          </a:xfrm>
-          <a:prstGeom prst="rect">
-            <a:avLst/>
-          </a:prstGeom>
-          <a:noFill/>
-          <a:ln/>
-        </p:spPr>
-        <p:txBody>
-          <a:bodyPr wrap="square" lIns="0" tIns="0" rIns="0" bIns="0" rtlCol="0" anchor="ctr"/>
-          <a:lstStyle/>
-          <a:p>
-            <a:pPr marL="0" indent="0" algn="ctr">
-              <a:buNone/>
-            </a:pPr>
-            <a:r>
-              <a:rPr lang="en-US" sz="1300" b="1" dirty="0">
-                <a:solidFill>
-                  <a:srgbClr val="1ABC9C"/>
-                </a:solidFill>
-                <a:latin typeface="Trebuchet MS" pitchFamily="34" charset="0"/>
-                <a:ea typeface="Trebuchet MS" pitchFamily="34" charset="-122"/>
-                <a:cs typeface="Trebuchet MS" pitchFamily="34" charset="-120"/>
-              </a:rPr>
-              <a:t>Pruébalo ahora</a:t>
-            </a:r>
-            <a:endParaRPr lang="en-US" sz="1300" dirty="0"/>
-          </a:p>
-        </p:txBody>
-      </p:sp>
-      <p:sp>
-        <p:nvSpPr>
-          <p:cNvPr id="13" name="Shape 8"/>
-          <p:cNvSpPr/>
-          <p:nvPr/>
-        </p:nvSpPr>
-        <p:spPr>
-          <a:xfrm>
-            <a:off x="5806440" y="1695649"/>
-            <a:ext cx="2377440" cy="2377440"/>
-          </a:xfrm>
-          <a:prstGeom prst="roundRect">
-            <a:avLst>
-              <a:gd name="adj" fmla="val 3077"/>
-            </a:avLst>
-          </a:prstGeom>
-          <a:solidFill>
-            <a:srgbClr val="FFFFFF"/>
-          </a:solidFill>
-          <a:ln/>
-        </p:spPr>
-        <p:txBody>
-          <a:bodyPr/>
-          <a:lstStyle/>
-          <a:p>
-            <a:endParaRPr lang="es-CO"/>
-          </a:p>
-        </p:txBody>
-      </p:sp>
-      <p:pic>
-        <p:nvPicPr>
-          <p:cNvPr id="14" name="Image 3" descr="qr_datosvivos.png"/>
-          <p:cNvPicPr>
-            <a:picLocks noChangeAspect="1"/>
-          </p:cNvPicPr>
-          <p:nvPr/>
-        </p:nvPicPr>
-        <p:blipFill>
-          <a:blip r:embed="rId4"/>
-          <a:stretch>
-            <a:fillRect/>
-          </a:stretch>
-        </p:blipFill>
-        <p:spPr>
-          <a:xfrm>
-            <a:off x="5961888" y="1851097"/>
-            <a:ext cx="2066544" cy="2066544"/>
-          </a:xfrm>
-          <a:prstGeom prst="rect">
-            <a:avLst/>
-          </a:prstGeom>
-        </p:spPr>
-      </p:pic>
-      <p:sp>
-        <p:nvSpPr>
-          <p:cNvPr id="15" name="Text 9"/>
-          <p:cNvSpPr/>
-          <p:nvPr/>
-        </p:nvSpPr>
-        <p:spPr>
-          <a:xfrm>
-            <a:off x="5806440" y="4164529"/>
-            <a:ext cx="2377440" cy="274320"/>
-          </a:xfrm>
-          <a:prstGeom prst="rect">
-            <a:avLst/>
-          </a:prstGeom>
-          <a:noFill/>
-          <a:ln/>
-        </p:spPr>
-        <p:txBody>
-          <a:bodyPr wrap="square" lIns="0" tIns="0" rIns="0" bIns="0" rtlCol="0" anchor="ctr"/>
-          <a:lstStyle/>
-          <a:p>
-            <a:pPr marL="0" indent="0" algn="ctr">
-              <a:buNone/>
-            </a:pPr>
-            <a:r>
-              <a:rPr lang="en-US" sz="1100" b="1" dirty="0">
-                <a:solidFill>
-                  <a:srgbClr val="AEC6D8"/>
-                </a:solidFill>
-                <a:latin typeface="Trebuchet MS" pitchFamily="34" charset="0"/>
-                <a:ea typeface="Trebuchet MS" pitchFamily="34" charset="-122"/>
-                <a:cs typeface="Trebuchet MS" pitchFamily="34" charset="-120"/>
-              </a:rPr>
-              <a:t>datosvivos.co</a:t>
-            </a:r>
-            <a:endParaRPr lang="en-US" sz="1100" dirty="0"/>
-          </a:p>
-        </p:txBody>
-      </p:sp>
-      <p:sp>
-        <p:nvSpPr>
           <p:cNvPr id="16" name="Text 10"/>
           <p:cNvSpPr/>
           <p:nvPr/>
@@ -11656,7 +11104,7 @@
           <a:bodyPr wrap="square" lIns="0" tIns="0" rIns="0" bIns="0" rtlCol="0" anchor="ctr"/>
           <a:lstStyle/>
           <a:p>
-            <a:pPr marL="0" indent="0">
+            <a:pPr marL="0" indent="0" algn="r">
               <a:buNone/>
             </a:pPr>
             <a:r>
@@ -11742,7 +11190,7 @@
           <a:blip>
             <a:extLst>
               <a:ext uri="{96DAC541-7B7A-43D3-8B79-37D633B846F1}">
-                <asvg:svgBlip xmlns:asvg="http://schemas.microsoft.com/office/drawing/2016/SVG/main" r:embed="rId5"/>
+                <asvg:svgBlip xmlns:asvg="http://schemas.microsoft.com/office/drawing/2016/SVG/main" r:embed="rId3"/>
               </a:ext>
             </a:extLst>
           </a:blip>
@@ -11778,7 +11226,7 @@
           <a:blip>
             <a:extLst>
               <a:ext uri="{96DAC541-7B7A-43D3-8B79-37D633B846F1}">
-                <asvg:svgBlip xmlns:asvg="http://schemas.microsoft.com/office/drawing/2016/SVG/main" r:embed="rId6"/>
+                <asvg:svgBlip xmlns:asvg="http://schemas.microsoft.com/office/drawing/2016/SVG/main" r:embed="rId4"/>
               </a:ext>
             </a:extLst>
           </a:blip>
@@ -11790,6 +11238,736 @@
           <a:xfrm>
             <a:off x="7777480" y="146867"/>
             <a:ext cx="436217" cy="797958"/>
+          </a:xfrm>
+          <a:prstGeom prst="rect">
+            <a:avLst/>
+          </a:prstGeom>
+        </p:spPr>
+      </p:pic>
+      <p:pic>
+        <p:nvPicPr>
+          <p:cNvPr id="20" name="Picture 19" descr="equipo-panel.jpg">
+            <a:extLst>
+              <a:ext uri="{FF2B5EF4-FFF2-40B4-BE49-F238E27FC236}">
+                <a16:creationId xmlns:a16="http://schemas.microsoft.com/office/drawing/2014/main" id="{6F4EA3F5-282A-CC7A-7692-B905BBE28988}"/>
+              </a:ext>
+            </a:extLst>
+          </p:cNvPr>
+          <p:cNvPicPr>
+            <a:picLocks noChangeAspect="1"/>
+          </p:cNvPicPr>
+          <p:nvPr/>
+        </p:nvPicPr>
+        <p:blipFill>
+          <a:blip r:embed="rId5"/>
+          <a:stretch>
+            <a:fillRect/>
+          </a:stretch>
+        </p:blipFill>
+        <p:spPr>
+          <a:xfrm flipH="1">
+            <a:off x="-12564" y="0"/>
+            <a:ext cx="3291840" cy="5143500"/>
+          </a:xfrm>
+          <a:prstGeom prst="rect">
+            <a:avLst/>
+          </a:prstGeom>
+        </p:spPr>
+      </p:pic>
+      <p:sp>
+        <p:nvSpPr>
+          <p:cNvPr id="21" name="TextBox 20">
+            <a:extLst>
+              <a:ext uri="{FF2B5EF4-FFF2-40B4-BE49-F238E27FC236}">
+                <a16:creationId xmlns:a16="http://schemas.microsoft.com/office/drawing/2014/main" id="{EFB2CC2B-7468-7009-65E0-2E96B5D9B3AD}"/>
+              </a:ext>
+            </a:extLst>
+          </p:cNvPr>
+          <p:cNvSpPr txBox="1"/>
+          <p:nvPr/>
+        </p:nvSpPr>
+        <p:spPr>
+          <a:xfrm>
+            <a:off x="3703320" y="1141421"/>
+            <a:ext cx="4754880" cy="731520"/>
+          </a:xfrm>
+          <a:prstGeom prst="rect">
+            <a:avLst/>
+          </a:prstGeom>
+          <a:noFill/>
+        </p:spPr>
+        <p:txBody>
+          <a:bodyPr wrap="square" lIns="0" tIns="0" rIns="0" bIns="0">
+            <a:spAutoFit/>
+          </a:bodyPr>
+          <a:lstStyle/>
+          <a:p>
+            <a:pPr algn="l"/>
+            <a:r>
+              <a:rPr sz="3800" b="1" dirty="0" err="1">
+                <a:solidFill>
+                  <a:srgbClr val="FFFFFF"/>
+                </a:solidFill>
+                <a:latin typeface="Trebuchet MS"/>
+              </a:rPr>
+              <a:t>datosvivos.co</a:t>
+            </a:r>
+            <a:endParaRPr sz="3800" b="1" dirty="0">
+              <a:solidFill>
+                <a:srgbClr val="FFFFFF"/>
+              </a:solidFill>
+              <a:latin typeface="Trebuchet MS"/>
+            </a:endParaRPr>
+          </a:p>
+        </p:txBody>
+      </p:sp>
+      <p:sp>
+        <p:nvSpPr>
+          <p:cNvPr id="22" name="TextBox 21">
+            <a:extLst>
+              <a:ext uri="{FF2B5EF4-FFF2-40B4-BE49-F238E27FC236}">
+                <a16:creationId xmlns:a16="http://schemas.microsoft.com/office/drawing/2014/main" id="{BA545D4E-FC03-A1BA-8A40-6932D32B58E9}"/>
+              </a:ext>
+            </a:extLst>
+          </p:cNvPr>
+          <p:cNvSpPr txBox="1"/>
+          <p:nvPr/>
+        </p:nvSpPr>
+        <p:spPr>
+          <a:xfrm>
+            <a:off x="3703320" y="1845509"/>
+            <a:ext cx="4572000" cy="548640"/>
+          </a:xfrm>
+          <a:prstGeom prst="rect">
+            <a:avLst/>
+          </a:prstGeom>
+          <a:noFill/>
+        </p:spPr>
+        <p:txBody>
+          <a:bodyPr wrap="square" lIns="0" tIns="0" rIns="0" bIns="0">
+            <a:spAutoFit/>
+          </a:bodyPr>
+          <a:lstStyle/>
+          <a:p>
+            <a:pPr algn="l"/>
+            <a:r>
+              <a:rPr sz="1250" b="0">
+                <a:solidFill>
+                  <a:srgbClr val="AEC6D8"/>
+                </a:solidFill>
+                <a:latin typeface="Calibri"/>
+              </a:rPr>
+              <a:t>El panorama de los datos abiertos de Colombia.</a:t>
+            </a:r>
+          </a:p>
+          <a:p>
+            <a:pPr algn="l"/>
+            <a:r>
+              <a:rPr sz="1250" b="0">
+                <a:solidFill>
+                  <a:srgbClr val="AEC6D8"/>
+                </a:solidFill>
+                <a:latin typeface="Calibri"/>
+              </a:rPr>
+              <a:t>En vivo, verificable, para decidir.</a:t>
+            </a:r>
+          </a:p>
+        </p:txBody>
+      </p:sp>
+      <p:sp>
+        <p:nvSpPr>
+          <p:cNvPr id="23" name="Rectangle 22">
+            <a:extLst>
+              <a:ext uri="{FF2B5EF4-FFF2-40B4-BE49-F238E27FC236}">
+                <a16:creationId xmlns:a16="http://schemas.microsoft.com/office/drawing/2014/main" id="{8699960C-AC79-CFD3-D074-FD89D2692DA7}"/>
+              </a:ext>
+            </a:extLst>
+          </p:cNvPr>
+          <p:cNvSpPr/>
+          <p:nvPr/>
+        </p:nvSpPr>
+        <p:spPr>
+          <a:xfrm>
+            <a:off x="3703320" y="2449013"/>
+            <a:ext cx="3108960" cy="27432"/>
+          </a:xfrm>
+          <a:prstGeom prst="rect">
+            <a:avLst/>
+          </a:prstGeom>
+          <a:solidFill>
+            <a:srgbClr val="1ABC9C"/>
+          </a:solidFill>
+          <a:ln>
+            <a:noFill/>
+          </a:ln>
+          <a:effectLst/>
+        </p:spPr>
+        <p:style>
+          <a:lnRef idx="1">
+            <a:schemeClr val="accent1"/>
+          </a:lnRef>
+          <a:fillRef idx="3">
+            <a:schemeClr val="accent1"/>
+          </a:fillRef>
+          <a:effectRef idx="2">
+            <a:schemeClr val="accent1"/>
+          </a:effectRef>
+          <a:fontRef idx="minor">
+            <a:schemeClr val="lt1"/>
+          </a:fontRef>
+        </p:style>
+        <p:txBody>
+          <a:bodyPr rtlCol="0" anchor="ctr"/>
+          <a:lstStyle/>
+          <a:p>
+            <a:pPr algn="ctr"/>
+            <a:endParaRPr/>
+          </a:p>
+        </p:txBody>
+      </p:sp>
+      <p:pic>
+        <p:nvPicPr>
+          <p:cNvPr id="24" name="Picture 23" descr="image17.png">
+            <a:extLst>
+              <a:ext uri="{FF2B5EF4-FFF2-40B4-BE49-F238E27FC236}">
+                <a16:creationId xmlns:a16="http://schemas.microsoft.com/office/drawing/2014/main" id="{6F60801A-C022-5F9F-8E9A-E700D66FB005}"/>
+              </a:ext>
+            </a:extLst>
+          </p:cNvPr>
+          <p:cNvPicPr>
+            <a:picLocks noChangeAspect="1"/>
+          </p:cNvPicPr>
+          <p:nvPr/>
+        </p:nvPicPr>
+        <p:blipFill>
+          <a:blip r:embed="rId6"/>
+          <a:stretch>
+            <a:fillRect/>
+          </a:stretch>
+        </p:blipFill>
+        <p:spPr>
+          <a:xfrm>
+            <a:off x="3703320" y="2705045"/>
+            <a:ext cx="201168" cy="201168"/>
+          </a:xfrm>
+          <a:prstGeom prst="rect">
+            <a:avLst/>
+          </a:prstGeom>
+        </p:spPr>
+      </p:pic>
+      <p:sp>
+        <p:nvSpPr>
+          <p:cNvPr id="25" name="TextBox 24">
+            <a:extLst>
+              <a:ext uri="{FF2B5EF4-FFF2-40B4-BE49-F238E27FC236}">
+                <a16:creationId xmlns:a16="http://schemas.microsoft.com/office/drawing/2014/main" id="{45105D4C-8CC7-B337-9D49-B6D7E35E4D59}"/>
+              </a:ext>
+            </a:extLst>
+          </p:cNvPr>
+          <p:cNvSpPr txBox="1"/>
+          <p:nvPr/>
+        </p:nvSpPr>
+        <p:spPr>
+          <a:xfrm>
+            <a:off x="4050792" y="2668469"/>
+            <a:ext cx="3017520" cy="292608"/>
+          </a:xfrm>
+          <a:prstGeom prst="rect">
+            <a:avLst/>
+          </a:prstGeom>
+          <a:noFill/>
+        </p:spPr>
+        <p:txBody>
+          <a:bodyPr wrap="square" lIns="0" tIns="0" rIns="0" bIns="0">
+            <a:spAutoFit/>
+          </a:bodyPr>
+          <a:lstStyle/>
+          <a:p>
+            <a:pPr algn="l"/>
+            <a:r>
+              <a:rPr sz="1000" b="1">
+                <a:solidFill>
+                  <a:srgbClr val="FFFFFF"/>
+                </a:solidFill>
+                <a:latin typeface="Calibri"/>
+              </a:rPr>
+              <a:t>Jhonatan Rico · jrico@ani.gov.co  · 310 419 6100</a:t>
+            </a:r>
+          </a:p>
+        </p:txBody>
+      </p:sp>
+      <p:pic>
+        <p:nvPicPr>
+          <p:cNvPr id="26" name="Picture 25" descr="image17.png">
+            <a:extLst>
+              <a:ext uri="{FF2B5EF4-FFF2-40B4-BE49-F238E27FC236}">
+                <a16:creationId xmlns:a16="http://schemas.microsoft.com/office/drawing/2014/main" id="{F4AFB41B-B56C-9813-9598-794261928F64}"/>
+              </a:ext>
+            </a:extLst>
+          </p:cNvPr>
+          <p:cNvPicPr>
+            <a:picLocks noChangeAspect="1"/>
+          </p:cNvPicPr>
+          <p:nvPr/>
+        </p:nvPicPr>
+        <p:blipFill>
+          <a:blip r:embed="rId6"/>
+          <a:stretch>
+            <a:fillRect/>
+          </a:stretch>
+        </p:blipFill>
+        <p:spPr>
+          <a:xfrm>
+            <a:off x="3703320" y="3052517"/>
+            <a:ext cx="201168" cy="201168"/>
+          </a:xfrm>
+          <a:prstGeom prst="rect">
+            <a:avLst/>
+          </a:prstGeom>
+        </p:spPr>
+      </p:pic>
+      <p:sp>
+        <p:nvSpPr>
+          <p:cNvPr id="27" name="TextBox 26">
+            <a:extLst>
+              <a:ext uri="{FF2B5EF4-FFF2-40B4-BE49-F238E27FC236}">
+                <a16:creationId xmlns:a16="http://schemas.microsoft.com/office/drawing/2014/main" id="{75C08ABC-5B79-67E4-C712-300B5396906F}"/>
+              </a:ext>
+            </a:extLst>
+          </p:cNvPr>
+          <p:cNvSpPr txBox="1"/>
+          <p:nvPr/>
+        </p:nvSpPr>
+        <p:spPr>
+          <a:xfrm>
+            <a:off x="4050792" y="3015941"/>
+            <a:ext cx="3017520" cy="292608"/>
+          </a:xfrm>
+          <a:prstGeom prst="rect">
+            <a:avLst/>
+          </a:prstGeom>
+          <a:noFill/>
+        </p:spPr>
+        <p:txBody>
+          <a:bodyPr wrap="square" lIns="0" tIns="0" rIns="0" bIns="0">
+            <a:spAutoFit/>
+          </a:bodyPr>
+          <a:lstStyle/>
+          <a:p>
+            <a:pPr algn="l"/>
+            <a:r>
+              <a:rPr sz="1000" b="1">
+                <a:solidFill>
+                  <a:srgbClr val="FFFFFF"/>
+                </a:solidFill>
+                <a:latin typeface="Calibri"/>
+              </a:rPr>
+              <a:t>Andrea Navarro · inavarro@ani.gov.co</a:t>
+            </a:r>
+          </a:p>
+        </p:txBody>
+      </p:sp>
+      <p:pic>
+        <p:nvPicPr>
+          <p:cNvPr id="28" name="Picture 27" descr="image17.png">
+            <a:extLst>
+              <a:ext uri="{FF2B5EF4-FFF2-40B4-BE49-F238E27FC236}">
+                <a16:creationId xmlns:a16="http://schemas.microsoft.com/office/drawing/2014/main" id="{9A4DD6CA-5F90-A244-B87C-63CA605FCDAF}"/>
+              </a:ext>
+            </a:extLst>
+          </p:cNvPr>
+          <p:cNvPicPr>
+            <a:picLocks noChangeAspect="1"/>
+          </p:cNvPicPr>
+          <p:nvPr/>
+        </p:nvPicPr>
+        <p:blipFill>
+          <a:blip r:embed="rId6"/>
+          <a:stretch>
+            <a:fillRect/>
+          </a:stretch>
+        </p:blipFill>
+        <p:spPr>
+          <a:xfrm>
+            <a:off x="3703320" y="3399989"/>
+            <a:ext cx="201168" cy="201168"/>
+          </a:xfrm>
+          <a:prstGeom prst="rect">
+            <a:avLst/>
+          </a:prstGeom>
+        </p:spPr>
+      </p:pic>
+      <p:sp>
+        <p:nvSpPr>
+          <p:cNvPr id="29" name="TextBox 28">
+            <a:extLst>
+              <a:ext uri="{FF2B5EF4-FFF2-40B4-BE49-F238E27FC236}">
+                <a16:creationId xmlns:a16="http://schemas.microsoft.com/office/drawing/2014/main" id="{2C89E94C-F2F7-9A20-2D57-B45DD47BDB42}"/>
+              </a:ext>
+            </a:extLst>
+          </p:cNvPr>
+          <p:cNvSpPr txBox="1"/>
+          <p:nvPr/>
+        </p:nvSpPr>
+        <p:spPr>
+          <a:xfrm>
+            <a:off x="4050792" y="3363413"/>
+            <a:ext cx="3017520" cy="292608"/>
+          </a:xfrm>
+          <a:prstGeom prst="rect">
+            <a:avLst/>
+          </a:prstGeom>
+          <a:noFill/>
+        </p:spPr>
+        <p:txBody>
+          <a:bodyPr wrap="square" lIns="0" tIns="0" rIns="0" bIns="0">
+            <a:spAutoFit/>
+          </a:bodyPr>
+          <a:lstStyle/>
+          <a:p>
+            <a:pPr algn="l"/>
+            <a:r>
+              <a:rPr sz="1000" b="1">
+                <a:solidFill>
+                  <a:srgbClr val="FFFFFF"/>
+                </a:solidFill>
+                <a:latin typeface="Calibri"/>
+              </a:rPr>
+              <a:t>Hernán Gutiérrez  · hgutierrez@ani.gov.co</a:t>
+            </a:r>
+          </a:p>
+        </p:txBody>
+      </p:sp>
+      <p:sp>
+        <p:nvSpPr>
+          <p:cNvPr id="30" name="TextBox 29">
+            <a:extLst>
+              <a:ext uri="{FF2B5EF4-FFF2-40B4-BE49-F238E27FC236}">
+                <a16:creationId xmlns:a16="http://schemas.microsoft.com/office/drawing/2014/main" id="{BDC53B27-75AA-49C7-FF40-EFB63ACD762D}"/>
+              </a:ext>
+            </a:extLst>
+          </p:cNvPr>
+          <p:cNvSpPr txBox="1"/>
+          <p:nvPr/>
+        </p:nvSpPr>
+        <p:spPr>
+          <a:xfrm>
+            <a:off x="3703320" y="3793181"/>
+            <a:ext cx="3291840" cy="274320"/>
+          </a:xfrm>
+          <a:prstGeom prst="rect">
+            <a:avLst/>
+          </a:prstGeom>
+          <a:noFill/>
+        </p:spPr>
+        <p:txBody>
+          <a:bodyPr wrap="square" lIns="0" tIns="0" rIns="0" bIns="0">
+            <a:spAutoFit/>
+          </a:bodyPr>
+          <a:lstStyle/>
+          <a:p>
+            <a:pPr algn="l"/>
+            <a:r>
+              <a:rPr sz="950" b="0">
+                <a:solidFill>
+                  <a:srgbClr val="9FB3C8"/>
+                </a:solidFill>
+                <a:latin typeface="Calibri"/>
+              </a:rPr>
+              <a:t>Equipo GIT TIC — Agencia Nacional de Infraestructura (ANI)</a:t>
+            </a:r>
+          </a:p>
+        </p:txBody>
+      </p:sp>
+      <p:sp>
+        <p:nvSpPr>
+          <p:cNvPr id="31" name="TextBox 30">
+            <a:extLst>
+              <a:ext uri="{FF2B5EF4-FFF2-40B4-BE49-F238E27FC236}">
+                <a16:creationId xmlns:a16="http://schemas.microsoft.com/office/drawing/2014/main" id="{3D8467A9-7410-AFBF-B1DB-8C382CA65B10}"/>
+              </a:ext>
+            </a:extLst>
+          </p:cNvPr>
+          <p:cNvSpPr txBox="1"/>
+          <p:nvPr/>
+        </p:nvSpPr>
+        <p:spPr>
+          <a:xfrm>
+            <a:off x="7265642" y="1625789"/>
+            <a:ext cx="1417320" cy="237744"/>
+          </a:xfrm>
+          <a:prstGeom prst="rect">
+            <a:avLst/>
+          </a:prstGeom>
+          <a:noFill/>
+        </p:spPr>
+        <p:txBody>
+          <a:bodyPr wrap="square" lIns="0" tIns="0" rIns="0" bIns="0">
+            <a:spAutoFit/>
+          </a:bodyPr>
+          <a:lstStyle/>
+          <a:p>
+            <a:pPr algn="ctr"/>
+            <a:r>
+              <a:rPr sz="950" b="1">
+                <a:solidFill>
+                  <a:srgbClr val="1ABC9C"/>
+                </a:solidFill>
+                <a:latin typeface="Trebuchet MS"/>
+              </a:rPr>
+              <a:t>Pruébalo ahora</a:t>
+            </a:r>
+          </a:p>
+        </p:txBody>
+      </p:sp>
+      <p:sp>
+        <p:nvSpPr>
+          <p:cNvPr id="32" name="Rounded Rectangle 31">
+            <a:extLst>
+              <a:ext uri="{FF2B5EF4-FFF2-40B4-BE49-F238E27FC236}">
+                <a16:creationId xmlns:a16="http://schemas.microsoft.com/office/drawing/2014/main" id="{1A645FBF-B584-3381-5175-CC5D5CF438A8}"/>
+              </a:ext>
+            </a:extLst>
+          </p:cNvPr>
+          <p:cNvSpPr/>
+          <p:nvPr/>
+        </p:nvSpPr>
+        <p:spPr>
+          <a:xfrm>
+            <a:off x="7265642" y="1900109"/>
+            <a:ext cx="1417320" cy="1417320"/>
+          </a:xfrm>
+          <a:prstGeom prst="roundRect">
+            <a:avLst/>
+          </a:prstGeom>
+          <a:solidFill>
+            <a:srgbClr val="FFFFFF"/>
+          </a:solidFill>
+          <a:ln>
+            <a:noFill/>
+          </a:ln>
+          <a:effectLst/>
+        </p:spPr>
+        <p:style>
+          <a:lnRef idx="1">
+            <a:schemeClr val="accent1"/>
+          </a:lnRef>
+          <a:fillRef idx="3">
+            <a:schemeClr val="accent1"/>
+          </a:fillRef>
+          <a:effectRef idx="2">
+            <a:schemeClr val="accent1"/>
+          </a:effectRef>
+          <a:fontRef idx="minor">
+            <a:schemeClr val="lt1"/>
+          </a:fontRef>
+        </p:style>
+        <p:txBody>
+          <a:bodyPr rtlCol="0" anchor="ctr"/>
+          <a:lstStyle/>
+          <a:p>
+            <a:pPr algn="ctr"/>
+            <a:endParaRPr/>
+          </a:p>
+        </p:txBody>
+      </p:sp>
+      <p:pic>
+        <p:nvPicPr>
+          <p:cNvPr id="33" name="Picture 32" descr="image1.png">
+            <a:extLst>
+              <a:ext uri="{FF2B5EF4-FFF2-40B4-BE49-F238E27FC236}">
+                <a16:creationId xmlns:a16="http://schemas.microsoft.com/office/drawing/2014/main" id="{E47F0DE6-26F4-CB98-8925-B19CA873766A}"/>
+              </a:ext>
+            </a:extLst>
+          </p:cNvPr>
+          <p:cNvPicPr>
+            <a:picLocks noChangeAspect="1"/>
+          </p:cNvPicPr>
+          <p:nvPr/>
+        </p:nvPicPr>
+        <p:blipFill>
+          <a:blip r:embed="rId7"/>
+          <a:stretch>
+            <a:fillRect/>
+          </a:stretch>
+        </p:blipFill>
+        <p:spPr>
+          <a:xfrm>
+            <a:off x="7358312" y="1992779"/>
+            <a:ext cx="1231978" cy="1231978"/>
+          </a:xfrm>
+          <a:prstGeom prst="rect">
+            <a:avLst/>
+          </a:prstGeom>
+        </p:spPr>
+      </p:pic>
+      <p:sp>
+        <p:nvSpPr>
+          <p:cNvPr id="34" name="TextBox 33">
+            <a:extLst>
+              <a:ext uri="{FF2B5EF4-FFF2-40B4-BE49-F238E27FC236}">
+                <a16:creationId xmlns:a16="http://schemas.microsoft.com/office/drawing/2014/main" id="{4FB0D751-2933-57E1-117B-3CFF2EBCFE15}"/>
+              </a:ext>
+            </a:extLst>
+          </p:cNvPr>
+          <p:cNvSpPr txBox="1"/>
+          <p:nvPr/>
+        </p:nvSpPr>
+        <p:spPr>
+          <a:xfrm>
+            <a:off x="7265642" y="3427157"/>
+            <a:ext cx="1417320" cy="237744"/>
+          </a:xfrm>
+          <a:prstGeom prst="rect">
+            <a:avLst/>
+          </a:prstGeom>
+          <a:noFill/>
+        </p:spPr>
+        <p:txBody>
+          <a:bodyPr wrap="square" lIns="0" tIns="0" rIns="0" bIns="0">
+            <a:spAutoFit/>
+          </a:bodyPr>
+          <a:lstStyle/>
+          <a:p>
+            <a:pPr algn="ctr"/>
+            <a:r>
+              <a:rPr sz="900" b="1">
+                <a:solidFill>
+                  <a:srgbClr val="AEC6D8"/>
+                </a:solidFill>
+                <a:latin typeface="Trebuchet MS"/>
+              </a:rPr>
+              <a:t>datosvivos.co</a:t>
+            </a:r>
+          </a:p>
+        </p:txBody>
+      </p:sp>
+      <p:pic>
+        <p:nvPicPr>
+          <p:cNvPr id="38" name="Picture 37">
+            <a:extLst>
+              <a:ext uri="{FF2B5EF4-FFF2-40B4-BE49-F238E27FC236}">
+                <a16:creationId xmlns:a16="http://schemas.microsoft.com/office/drawing/2014/main" id="{5C0C38BA-A15B-0EB1-C5F3-148D42C3B350}"/>
+              </a:ext>
+            </a:extLst>
+          </p:cNvPr>
+          <p:cNvPicPr>
+            <a:picLocks noChangeAspect="1"/>
+          </p:cNvPicPr>
+          <p:nvPr/>
+        </p:nvPicPr>
+        <p:blipFill>
+          <a:blip r:embed="rId8"/>
+          <a:stretch>
+            <a:fillRect/>
+          </a:stretch>
+        </p:blipFill>
+        <p:spPr>
+          <a:xfrm>
+            <a:off x="1255614" y="943445"/>
+            <a:ext cx="477771" cy="156880"/>
+          </a:xfrm>
+          <a:prstGeom prst="rect">
+            <a:avLst/>
+          </a:prstGeom>
+        </p:spPr>
+      </p:pic>
+      <p:pic>
+        <p:nvPicPr>
+          <p:cNvPr id="39" name="Picture 38">
+            <a:extLst>
+              <a:ext uri="{FF2B5EF4-FFF2-40B4-BE49-F238E27FC236}">
+                <a16:creationId xmlns:a16="http://schemas.microsoft.com/office/drawing/2014/main" id="{3823096E-50E4-ACE2-81DD-94BCC6529133}"/>
+              </a:ext>
+            </a:extLst>
+          </p:cNvPr>
+          <p:cNvPicPr>
+            <a:picLocks noChangeAspect="1"/>
+          </p:cNvPicPr>
+          <p:nvPr/>
+        </p:nvPicPr>
+        <p:blipFill>
+          <a:blip r:embed="rId8"/>
+          <a:stretch>
+            <a:fillRect/>
+          </a:stretch>
+        </p:blipFill>
+        <p:spPr>
+          <a:xfrm>
+            <a:off x="1255613" y="835301"/>
+            <a:ext cx="477771" cy="156880"/>
+          </a:xfrm>
+          <a:prstGeom prst="rect">
+            <a:avLst/>
+          </a:prstGeom>
+        </p:spPr>
+      </p:pic>
+      <p:pic>
+        <p:nvPicPr>
+          <p:cNvPr id="41" name="Graphic 40" descr="Logotipo de la Agencia Nacional de Infraestructura">
+            <a:extLst>
+              <a:ext uri="{FF2B5EF4-FFF2-40B4-BE49-F238E27FC236}">
+                <a16:creationId xmlns:a16="http://schemas.microsoft.com/office/drawing/2014/main" id="{ED760E26-92A9-01D2-3913-0A7ED41091C5}"/>
+              </a:ext>
+            </a:extLst>
+          </p:cNvPr>
+          <p:cNvPicPr>
+            <a:picLocks noChangeAspect="1"/>
+          </p:cNvPicPr>
+          <p:nvPr/>
+        </p:nvPicPr>
+        <p:blipFill>
+          <a:blip>
+            <a:extLst>
+              <a:ext uri="{96DAC541-7B7A-43D3-8B79-37D633B846F1}">
+                <asvg:svgBlip xmlns:asvg="http://schemas.microsoft.com/office/drawing/2016/SVG/main" r:embed="rId9"/>
+              </a:ext>
+            </a:extLst>
+          </a:blip>
+          <a:stretch>
+            <a:fillRect/>
+          </a:stretch>
+        </p:blipFill>
+        <p:spPr>
+          <a:xfrm>
+            <a:off x="1240717" y="704605"/>
+            <a:ext cx="364045" cy="492135"/>
+          </a:xfrm>
+          <a:prstGeom prst="rect">
+            <a:avLst/>
+          </a:prstGeom>
+        </p:spPr>
+      </p:pic>
+      <p:pic>
+        <p:nvPicPr>
+          <p:cNvPr id="42" name="Graphic 41" descr="Logotipo de la Agencia Nacional de Infraestructura">
+            <a:extLst>
+              <a:ext uri="{FF2B5EF4-FFF2-40B4-BE49-F238E27FC236}">
+                <a16:creationId xmlns:a16="http://schemas.microsoft.com/office/drawing/2014/main" id="{69F7DBB0-640F-6F60-4D76-D29DB36C9767}"/>
+              </a:ext>
+            </a:extLst>
+          </p:cNvPr>
+          <p:cNvPicPr>
+            <a:picLocks noChangeAspect="1"/>
+          </p:cNvPicPr>
+          <p:nvPr/>
+        </p:nvPicPr>
+        <p:blipFill>
+          <a:blip>
+            <a:extLst>
+              <a:ext uri="{96DAC541-7B7A-43D3-8B79-37D633B846F1}">
+                <asvg:svgBlip xmlns:asvg="http://schemas.microsoft.com/office/drawing/2016/SVG/main" r:embed="rId9"/>
+              </a:ext>
+            </a:extLst>
+          </a:blip>
+          <a:stretch>
+            <a:fillRect/>
+          </a:stretch>
+        </p:blipFill>
+        <p:spPr>
+          <a:xfrm>
+            <a:off x="2822050" y="880104"/>
+            <a:ext cx="400450" cy="541349"/>
           </a:xfrm>
           <a:prstGeom prst="rect">
             <a:avLst/>
@@ -14143,6 +14321,14 @@
   <p:clrMapOvr>
     <a:masterClrMapping/>
   </p:clrMapOvr>
+  <mc:AlternateContent xmlns:mc="http://schemas.openxmlformats.org/markup-compatibility/2006">
+    <mc:Choice xmlns:p14="http://schemas.microsoft.com/office/powerpoint/2010/main" Requires="p14">
+      <p:transition spd="slow" p14:dur="2000" advClick="0"/>
+    </mc:Choice>
+    <mc:Fallback>
+      <p:transition spd="slow" advClick="0"/>
+    </mc:Fallback>
+  </mc:AlternateContent>
 </p:sld>
 </file>
 
